--- a/docs/streaming_bridge/VoiceShield-Bridge-3slides.pptx
+++ b/docs/streaming_bridge/VoiceShield-Bridge-3slides.pptx
@@ -3098,8 +3098,8 @@
         </p:nvSpPr>
         <p:spPr>
           <a:xfrm>
-            <a:off x="384048" y="146304"/>
-            <a:ext cx="11430000" cy="402336"/>
+            <a:off x="384048" y="128016"/>
+            <a:ext cx="11430000" cy="531368"/>
           </a:xfrm>
           <a:prstGeom prst="rect">
             <a:avLst/>
@@ -3107,26 +3107,26 @@
           <a:noFill/>
         </p:spPr>
         <p:txBody>
-          <a:bodyPr wrap="square" lIns="0" rIns="0" tIns="0" bIns="0" anchor="t">
+          <a:bodyPr wrap="square" lIns="0" rIns="0" tIns="0" bIns="0">
             <a:spAutoFit/>
           </a:bodyPr>
           <a:lstStyle/>
           <a:p>
             <a:r>
-              <a:rPr sz="2500" b="1">
+              <a:rPr sz="2400" b="1">
                 <a:solidFill>
                   <a:srgbClr val="1E1E1E"/>
                 </a:solidFill>
-                <a:latin typeface="Arial"/>
-              </a:rPr>
-              <a:t>Streaming Middleware Bridge (gRPC)</a:t>
-            </a:r>
-            <a:r>
-              <a:rPr sz="2500" b="0">
+                <a:latin typeface="Architects Daughter"/>
+              </a:rPr>
+              <a:t>Streaming Middleware Bridge</a:t>
+            </a:r>
+            <a:r>
+              <a:rPr sz="2400" b="0">
                 <a:solidFill>
                   <a:srgbClr val="1971C2"/>
                 </a:solidFill>
-                <a:latin typeface="Arial"/>
+                <a:latin typeface="Architects Daughter"/>
               </a:rPr>
               <a:t>  —  Component 2 of 4</a:t>
             </a:r>
@@ -3141,8 +3141,8 @@
         </p:nvSpPr>
         <p:spPr>
           <a:xfrm>
-            <a:off x="384048" y="566928"/>
-            <a:ext cx="11430000" cy="237744"/>
+            <a:off x="384048" y="695960"/>
+            <a:ext cx="11430000" cy="484123"/>
           </a:xfrm>
           <a:prstGeom prst="rect">
             <a:avLst/>
@@ -3150,17 +3150,17 @@
           <a:noFill/>
         </p:spPr>
         <p:txBody>
-          <a:bodyPr wrap="square" lIns="0" rIns="0" tIns="0" bIns="0" anchor="t">
+          <a:bodyPr wrap="square" lIns="0" rIns="0" tIns="0" bIns="0">
             <a:spAutoFit/>
           </a:bodyPr>
           <a:lstStyle/>
           <a:p>
             <a:r>
-              <a:rPr sz="1100">
+              <a:rPr sz="1050" b="0">
                 <a:solidFill>
                   <a:srgbClr val="5C5650"/>
                 </a:solidFill>
-                <a:latin typeface="Arial"/>
+                <a:latin typeface="Architects Daughter"/>
               </a:rPr>
               <a:t>The only stateful, real-time component. Turns live forked call audio into scored analysis windows inside a 500 ms budget, for ~1,200 concurrent calls — on a stream that cannot be paused.</a:t>
             </a:r>
@@ -3175,8 +3175,8 @@
         </p:nvSpPr>
         <p:spPr>
           <a:xfrm>
-            <a:off x="384048" y="896112"/>
-            <a:ext cx="2514600" cy="2395728"/>
+            <a:off x="384048" y="1308100"/>
+            <a:ext cx="2240280" cy="2172715"/>
           </a:xfrm>
           <a:prstGeom prst="roundRect">
             <a:avLst>
@@ -3186,7 +3186,7 @@
           <a:solidFill>
             <a:srgbClr val="F5F2EC"/>
           </a:solidFill>
-          <a:ln w="25400">
+          <a:ln w="28575">
             <a:solidFill>
               <a:srgbClr val="1E1E1E"/>
             </a:solidFill>
@@ -3217,51 +3217,56 @@
           </a:fontRef>
         </p:style>
         <p:txBody>
-          <a:bodyPr rtlCol="0" anchor="ctr" wrap="square" tIns="54864" bIns="54864"/>
+          <a:bodyPr rtlCol="0" anchor="ctr" wrap="square" lIns="100584" rIns="100584" tIns="64008" bIns="64008"/>
           <a:lstStyle/>
           <a:p>
             <a:pPr algn="ctr"/>
             <a:r>
-              <a:rPr sz="1450" b="1">
+              <a:rPr sz="1300" b="1">
                 <a:solidFill>
                   <a:srgbClr val="1E1E1E"/>
                 </a:solidFill>
-                <a:latin typeface="Arial"/>
+                <a:latin typeface="Architects Daughter"/>
               </a:rPr>
               <a:t>(1) TELEPHONY &amp;</a:t>
             </a:r>
           </a:p>
           <a:p>
-            <a:r>
-              <a:rPr sz="1450" b="1">
+            <a:pPr algn="ctr">
+              <a:spcBef>
+                <a:spcPts val="200"/>
+              </a:spcBef>
+            </a:pPr>
+            <a:r>
+              <a:rPr sz="1300" b="1">
                 <a:solidFill>
                   <a:srgbClr val="1E1E1E"/>
                 </a:solidFill>
-                <a:latin typeface="Arial"/>
+                <a:latin typeface="Architects Daughter"/>
               </a:rPr>
               <a:t>MEDIA GATEWAY</a:t>
             </a:r>
           </a:p>
           <a:p>
-            <a:pPr>
-              <a:spcBef>
-                <a:spcPts val="700"/>
-              </a:spcBef>
-            </a:pPr>
-            <a:r>
-              <a:rPr sz="900" b="0">
+            <a:pPr algn="ctr">
+              <a:spcBef>
+                <a:spcPts val="200"/>
+              </a:spcBef>
+            </a:pPr>
+            <a:r>
+              <a:rPr sz="850" b="0">
                 <a:solidFill>
                   <a:srgbClr val="5C5650"/>
                 </a:solidFill>
-                <a:latin typeface="Arial"/>
+                <a:latin typeface="Architects Daughter"/>
               </a:rPr>
               <a:t>FreeSWITCH + mod_audio_stream</a:t>
             </a:r>
           </a:p>
           <a:p>
-            <a:pPr>
-              <a:spcBef>
-                <a:spcPts val="100"/>
+            <a:pPr algn="ctr">
+              <a:spcBef>
+                <a:spcPts val="200"/>
               </a:spcBef>
             </a:pPr>
             <a:r>
@@ -3269,15 +3274,15 @@
                 <a:solidFill>
                   <a:srgbClr val="5C5650"/>
                 </a:solidFill>
-                <a:latin typeface="Arial"/>
+                <a:latin typeface="Architects Daughter"/>
               </a:rPr>
               <a:t>SIP / RTP · forks call audio</a:t>
             </a:r>
           </a:p>
           <a:p>
-            <a:pPr>
-              <a:spcBef>
-                <a:spcPts val="100"/>
+            <a:pPr algn="ctr">
+              <a:spcBef>
+                <a:spcPts val="200"/>
               </a:spcBef>
             </a:pPr>
             <a:r>
@@ -3285,7 +3290,7 @@
                 <a:solidFill>
                   <a:srgbClr val="5C5650"/>
                 </a:solidFill>
-                <a:latin typeface="Arial"/>
+                <a:latin typeface="Architects Daughter"/>
               </a:rPr>
               <a:t>thread-isolated per channel</a:t>
             </a:r>
@@ -3300,8 +3305,8 @@
         </p:nvSpPr>
         <p:spPr>
           <a:xfrm>
-            <a:off x="3282696" y="786384"/>
-            <a:ext cx="2926080" cy="2633472"/>
+            <a:off x="3246120" y="1216660"/>
+            <a:ext cx="2834640" cy="2355596"/>
           </a:xfrm>
           <a:prstGeom prst="roundRect">
             <a:avLst>
@@ -3311,7 +3316,7 @@
           <a:solidFill>
             <a:srgbClr val="A5D8FF"/>
           </a:solidFill>
-          <a:ln w="41275">
+          <a:ln w="44450">
             <a:solidFill>
               <a:srgbClr val="1971C2"/>
             </a:solidFill>
@@ -3342,51 +3347,56 @@
           </a:fontRef>
         </p:style>
         <p:txBody>
-          <a:bodyPr rtlCol="0" anchor="ctr" wrap="square" tIns="54864" bIns="54864"/>
+          <a:bodyPr rtlCol="0" anchor="ctr" wrap="square" lIns="100584" rIns="100584" tIns="64008" bIns="64008"/>
           <a:lstStyle/>
           <a:p>
             <a:pPr algn="ctr"/>
             <a:r>
-              <a:rPr sz="1600" b="1">
+              <a:rPr sz="1500" b="1">
                 <a:solidFill>
                   <a:srgbClr val="1971C2"/>
                 </a:solidFill>
-                <a:latin typeface="Arial"/>
+                <a:latin typeface="Architects Daughter"/>
               </a:rPr>
               <a:t>(2) STREAMING BRIDGE</a:t>
             </a:r>
           </a:p>
           <a:p>
-            <a:r>
-              <a:rPr sz="1600" b="1">
+            <a:pPr algn="ctr">
+              <a:spcBef>
+                <a:spcPts val="200"/>
+              </a:spcBef>
+            </a:pPr>
+            <a:r>
+              <a:rPr sz="1500" b="1">
                 <a:solidFill>
                   <a:srgbClr val="1971C2"/>
                 </a:solidFill>
-                <a:latin typeface="Arial"/>
+                <a:latin typeface="Architects Daughter"/>
               </a:rPr>
               <a:t>gRPC</a:t>
             </a:r>
           </a:p>
           <a:p>
-            <a:pPr>
-              <a:spcBef>
-                <a:spcPts val="500"/>
-              </a:spcBef>
-            </a:pPr>
-            <a:r>
-              <a:rPr sz="900" b="1">
+            <a:pPr algn="ctr">
+              <a:spcBef>
+                <a:spcPts val="200"/>
+              </a:spcBef>
+            </a:pPr>
+            <a:r>
+              <a:rPr sz="950" b="1">
                 <a:solidFill>
                   <a:srgbClr val="1971C2"/>
                 </a:solidFill>
-                <a:latin typeface="Arial"/>
+                <a:latin typeface="Architects Daughter"/>
               </a:rPr>
               <a:t>MY COMPONENT</a:t>
             </a:r>
           </a:p>
           <a:p>
-            <a:pPr>
-              <a:spcBef>
-                <a:spcPts val="400"/>
+            <a:pPr algn="ctr">
+              <a:spcBef>
+                <a:spcPts val="200"/>
               </a:spcBef>
             </a:pPr>
             <a:r>
@@ -3394,15 +3404,15 @@
                 <a:solidFill>
                   <a:srgbClr val="1E1E1E"/>
                 </a:solidFill>
-                <a:latin typeface="Arial"/>
-              </a:rPr>
-              <a:t>normalise · session state ·</a:t>
-            </a:r>
-          </a:p>
-          <a:p>
-            <a:pPr>
-              <a:spcBef>
-                <a:spcPts val="100"/>
+                <a:latin typeface="Architects Daughter"/>
+              </a:rPr>
+              <a:t>normalise · session state</a:t>
+            </a:r>
+          </a:p>
+          <a:p>
+            <a:pPr algn="ctr">
+              <a:spcBef>
+                <a:spcPts val="200"/>
               </a:spcBef>
             </a:pPr>
             <a:r>
@@ -3410,15 +3420,15 @@
                 <a:solidFill>
                   <a:srgbClr val="1E1E1E"/>
                 </a:solidFill>
-                <a:latin typeface="Arial"/>
+                <a:latin typeface="Architects Daughter"/>
               </a:rPr>
               <a:t>buffer · window · transport</a:t>
             </a:r>
           </a:p>
           <a:p>
-            <a:pPr>
-              <a:spcBef>
-                <a:spcPts val="100"/>
+            <a:pPr algn="ctr">
+              <a:spcBef>
+                <a:spcPts val="200"/>
               </a:spcBef>
             </a:pPr>
             <a:r>
@@ -3426,7 +3436,7 @@
                 <a:solidFill>
                   <a:srgbClr val="1E1E1E"/>
                 </a:solidFill>
-                <a:latin typeface="Arial"/>
+                <a:latin typeface="Architects Daughter"/>
               </a:rPr>
               <a:t>reorder · fan-out · degrade</a:t>
             </a:r>
@@ -3441,8 +3451,8 @@
         </p:nvSpPr>
         <p:spPr>
           <a:xfrm>
-            <a:off x="6592824" y="896112"/>
-            <a:ext cx="2514600" cy="2395728"/>
+            <a:off x="6702552" y="1308100"/>
+            <a:ext cx="2331720" cy="2172715"/>
           </a:xfrm>
           <a:prstGeom prst="roundRect">
             <a:avLst>
@@ -3452,7 +3462,7 @@
           <a:solidFill>
             <a:srgbClr val="F5F2EC"/>
           </a:solidFill>
-          <a:ln w="25400">
+          <a:ln w="28575">
             <a:solidFill>
               <a:srgbClr val="1E1E1E"/>
             </a:solidFill>
@@ -3483,24 +3493,24 @@
           </a:fontRef>
         </p:style>
         <p:txBody>
-          <a:bodyPr rtlCol="0" anchor="ctr" wrap="square" tIns="54864" bIns="54864"/>
+          <a:bodyPr rtlCol="0" anchor="ctr" wrap="square" lIns="100584" rIns="100584" tIns="64008" bIns="64008"/>
           <a:lstStyle/>
           <a:p>
             <a:pPr algn="ctr"/>
             <a:r>
-              <a:rPr sz="1450" b="1">
+              <a:rPr sz="1300" b="1">
                 <a:solidFill>
                   <a:srgbClr val="1E1E1E"/>
                 </a:solidFill>
-                <a:latin typeface="Arial"/>
+                <a:latin typeface="Architects Daughter"/>
               </a:rPr>
               <a:t>(3) AI &amp; DSP ENGINE</a:t>
             </a:r>
           </a:p>
           <a:p>
-            <a:pPr>
-              <a:spcBef>
-                <a:spcPts val="500"/>
+            <a:pPr algn="ctr">
+              <a:spcBef>
+                <a:spcPts val="200"/>
               </a:spcBef>
             </a:pPr>
             <a:r>
@@ -3508,15 +3518,15 @@
                 <a:solidFill>
                   <a:srgbClr val="5C5650"/>
                 </a:solidFill>
-                <a:latin typeface="Arial"/>
+                <a:latin typeface="Architects Daughter"/>
               </a:rPr>
               <a:t>WavLM + LFCC/MGD fusion</a:t>
             </a:r>
           </a:p>
           <a:p>
-            <a:pPr>
-              <a:spcBef>
-                <a:spcPts val="100"/>
+            <a:pPr algn="ctr">
+              <a:spcBef>
+                <a:spcPts val="200"/>
               </a:spcBef>
             </a:pPr>
             <a:r>
@@ -3524,15 +3534,15 @@
                 <a:solidFill>
                   <a:srgbClr val="5C5650"/>
                 </a:solidFill>
-                <a:latin typeface="Arial"/>
+                <a:latin typeface="Architects Daughter"/>
               </a:rPr>
               <a:t>Silero VAD · ECAPA-TDNN</a:t>
             </a:r>
           </a:p>
           <a:p>
-            <a:pPr>
-              <a:spcBef>
-                <a:spcPts val="100"/>
+            <a:pPr algn="ctr">
+              <a:spcBef>
+                <a:spcPts val="200"/>
               </a:spcBef>
             </a:pPr>
             <a:r>
@@ -3540,15 +3550,15 @@
                 <a:solidFill>
                   <a:srgbClr val="5C5650"/>
                 </a:solidFill>
-                <a:latin typeface="Arial"/>
+                <a:latin typeface="Architects Daughter"/>
               </a:rPr>
               <a:t>RTF &lt;= 0.1 target</a:t>
             </a:r>
           </a:p>
           <a:p>
-            <a:pPr>
-              <a:spcBef>
-                <a:spcPts val="100"/>
+            <a:pPr algn="ctr">
+              <a:spcBef>
+                <a:spcPts val="200"/>
               </a:spcBef>
             </a:pPr>
             <a:r>
@@ -3556,9 +3566,9 @@
                 <a:solidFill>
                   <a:srgbClr val="5C5650"/>
                 </a:solidFill>
-                <a:latin typeface="Arial"/>
-              </a:rPr>
-              <a:t>dev EER 0.55% (in-domain)</a:t>
+                <a:latin typeface="Architects Daughter"/>
+              </a:rPr>
+              <a:t>dev EER 0.55% in-domain</a:t>
             </a:r>
           </a:p>
         </p:txBody>
@@ -3571,8 +3581,8 @@
         </p:nvSpPr>
         <p:spPr>
           <a:xfrm>
-            <a:off x="9491472" y="896112"/>
-            <a:ext cx="2313432" cy="2395728"/>
+            <a:off x="9656064" y="1308100"/>
+            <a:ext cx="2148840" cy="2172715"/>
           </a:xfrm>
           <a:prstGeom prst="roundRect">
             <a:avLst>
@@ -3582,7 +3592,7 @@
           <a:solidFill>
             <a:srgbClr val="F5F2EC"/>
           </a:solidFill>
-          <a:ln w="25400">
+          <a:ln w="28575">
             <a:solidFill>
               <a:srgbClr val="1E1E1E"/>
             </a:solidFill>
@@ -3613,35 +3623,40 @@
           </a:fontRef>
         </p:style>
         <p:txBody>
-          <a:bodyPr rtlCol="0" anchor="ctr" wrap="square" tIns="54864" bIns="54864"/>
+          <a:bodyPr rtlCol="0" anchor="ctr" wrap="square" lIns="100584" rIns="100584" tIns="64008" bIns="64008"/>
           <a:lstStyle/>
           <a:p>
             <a:pPr algn="ctr"/>
             <a:r>
-              <a:rPr sz="1450" b="1">
+              <a:rPr sz="1300" b="1">
                 <a:solidFill>
                   <a:srgbClr val="1E1E1E"/>
                 </a:solidFill>
-                <a:latin typeface="Arial"/>
+                <a:latin typeface="Architects Daughter"/>
               </a:rPr>
               <a:t>(4) RISK ENGINE</a:t>
             </a:r>
           </a:p>
           <a:p>
-            <a:r>
-              <a:rPr sz="1450" b="1">
+            <a:pPr algn="ctr">
+              <a:spcBef>
+                <a:spcPts val="200"/>
+              </a:spcBef>
+            </a:pPr>
+            <a:r>
+              <a:rPr sz="1300" b="1">
                 <a:solidFill>
                   <a:srgbClr val="1E1E1E"/>
                 </a:solidFill>
-                <a:latin typeface="Arial"/>
+                <a:latin typeface="Architects Daughter"/>
               </a:rPr>
               <a:t>+ DASHBOARD</a:t>
             </a:r>
           </a:p>
           <a:p>
-            <a:pPr>
-              <a:spcBef>
-                <a:spcPts val="500"/>
+            <a:pPr algn="ctr">
+              <a:spcBef>
+                <a:spcPts val="200"/>
               </a:spcBef>
             </a:pPr>
             <a:r>
@@ -3649,15 +3664,15 @@
                 <a:solidFill>
                   <a:srgbClr val="5C5650"/>
                 </a:solidFill>
-                <a:latin typeface="Arial"/>
+                <a:latin typeface="Architects Daughter"/>
               </a:rPr>
               <a:t>weighted multi-signal fusion</a:t>
             </a:r>
           </a:p>
           <a:p>
-            <a:pPr>
-              <a:spcBef>
-                <a:spcPts val="100"/>
+            <a:pPr algn="ctr">
+              <a:spcBef>
+                <a:spcPts val="200"/>
               </a:spcBef>
             </a:pPr>
             <a:r>
@@ -3665,15 +3680,15 @@
                 <a:solidFill>
                   <a:srgbClr val="5C5650"/>
                 </a:solidFill>
-                <a:latin typeface="Arial"/>
+                <a:latin typeface="Architects Daughter"/>
               </a:rPr>
               <a:t>dynamic thresholds</a:t>
             </a:r>
           </a:p>
           <a:p>
-            <a:pPr>
-              <a:spcBef>
-                <a:spcPts val="100"/>
+            <a:pPr algn="ctr">
+              <a:spcBef>
+                <a:spcPts val="200"/>
               </a:spcBef>
             </a:pPr>
             <a:r>
@@ -3681,7 +3696,7 @@
                 <a:solidFill>
                   <a:srgbClr val="5C5650"/>
                 </a:solidFill>
-                <a:latin typeface="Arial"/>
+                <a:latin typeface="Architects Daughter"/>
               </a:rPr>
               <a:t>prevention + CRM webhooks</a:t>
             </a:r>
@@ -3696,17 +3711,17 @@
         </p:nvCxnSpPr>
         <p:spPr>
           <a:xfrm>
-            <a:off x="2898648" y="2093976"/>
-            <a:ext cx="347472" cy="0"/>
+            <a:off x="2697480" y="2394458"/>
+            <a:ext cx="475488" cy="0"/>
           </a:xfrm>
           <a:prstGeom prst="line">
             <a:avLst/>
           </a:prstGeom>
-          <a:ln w="28575">
+          <a:ln w="41275">
             <a:solidFill>
               <a:srgbClr val="1E1E1E"/>
             </a:solidFill>
-            <a:tailEnd type="triangle" w="med" len="med"/>
+            <a:tailEnd type="triangle" w="lg" len="lg"/>
           </a:ln>
         </p:spPr>
         <p:style>
@@ -3732,8 +3747,8 @@
         </p:nvSpPr>
         <p:spPr>
           <a:xfrm>
-            <a:off x="2706624" y="1819656"/>
-            <a:ext cx="731520" cy="164592"/>
+            <a:off x="2679191" y="2065274"/>
+            <a:ext cx="512064" cy="182880"/>
           </a:xfrm>
           <a:prstGeom prst="rect">
             <a:avLst/>
@@ -3741,20 +3756,20 @@
           <a:noFill/>
         </p:spPr>
         <p:txBody>
-          <a:bodyPr wrap="square" lIns="0" rIns="0" tIns="0" bIns="0" anchor="t">
+          <a:bodyPr wrap="square" lIns="0" rIns="0" tIns="0" bIns="0">
             <a:spAutoFit/>
           </a:bodyPr>
           <a:lstStyle/>
           <a:p>
             <a:pPr algn="ctr"/>
             <a:r>
-              <a:rPr sz="850" b="0">
+              <a:rPr sz="800" b="1">
                 <a:solidFill>
                   <a:srgbClr val="5C5650"/>
                 </a:solidFill>
-                <a:latin typeface="Arial"/>
-              </a:rPr>
-              <a:t>WS · L16</a:t>
+                <a:latin typeface="Architects Daughter"/>
+              </a:rPr>
+              <a:t>L16</a:t>
             </a:r>
           </a:p>
         </p:txBody>
@@ -3767,17 +3782,17 @@
         </p:nvCxnSpPr>
         <p:spPr>
           <a:xfrm>
-            <a:off x="6245352" y="1929384"/>
-            <a:ext cx="310896" cy="0"/>
+            <a:off x="6153912" y="2156714"/>
+            <a:ext cx="475488" cy="0"/>
           </a:xfrm>
           <a:prstGeom prst="line">
             <a:avLst/>
           </a:prstGeom>
-          <a:ln w="28575">
+          <a:ln w="41275">
             <a:solidFill>
               <a:srgbClr val="1E1E1E"/>
             </a:solidFill>
-            <a:tailEnd type="triangle" w="med" len="med"/>
+            <a:tailEnd type="triangle" w="lg" len="lg"/>
           </a:ln>
         </p:spPr>
         <p:style>
@@ -3803,8 +3818,8 @@
         </p:nvSpPr>
         <p:spPr>
           <a:xfrm>
-            <a:off x="6053328" y="1655064"/>
-            <a:ext cx="731520" cy="164592"/>
+            <a:off x="6135624" y="1827529"/>
+            <a:ext cx="512064" cy="182880"/>
           </a:xfrm>
           <a:prstGeom prst="rect">
             <a:avLst/>
@@ -3812,18 +3827,18 @@
           <a:noFill/>
         </p:spPr>
         <p:txBody>
-          <a:bodyPr wrap="square" lIns="0" rIns="0" tIns="0" bIns="0" anchor="t">
+          <a:bodyPr wrap="square" lIns="0" rIns="0" tIns="0" bIns="0">
             <a:spAutoFit/>
           </a:bodyPr>
           <a:lstStyle/>
           <a:p>
             <a:pPr algn="ctr"/>
             <a:r>
-              <a:rPr sz="850" b="0">
+              <a:rPr sz="800" b="1">
                 <a:solidFill>
                   <a:srgbClr val="5C5650"/>
                 </a:solidFill>
-                <a:latin typeface="Arial"/>
+                <a:latin typeface="Architects Daughter"/>
               </a:rPr>
               <a:t>windows</a:t>
             </a:r>
@@ -3838,17 +3853,17 @@
         </p:nvCxnSpPr>
         <p:spPr>
           <a:xfrm flipH="1">
-            <a:off x="6245352" y="2295144"/>
-            <a:ext cx="310896" cy="0"/>
+            <a:off x="6153912" y="2632201"/>
+            <a:ext cx="475488" cy="0"/>
           </a:xfrm>
           <a:prstGeom prst="line">
             <a:avLst/>
           </a:prstGeom>
-          <a:ln w="28575">
+          <a:ln w="41275">
             <a:solidFill>
               <a:srgbClr val="9C36B5"/>
             </a:solidFill>
-            <a:tailEnd type="triangle" w="med" len="med"/>
+            <a:tailEnd type="triangle" w="lg" len="lg"/>
           </a:ln>
         </p:spPr>
         <p:style>
@@ -3874,8 +3889,8 @@
         </p:nvSpPr>
         <p:spPr>
           <a:xfrm>
-            <a:off x="6053328" y="2350008"/>
-            <a:ext cx="731520" cy="164592"/>
+            <a:off x="6135624" y="2705354"/>
+            <a:ext cx="512064" cy="182880"/>
           </a:xfrm>
           <a:prstGeom prst="rect">
             <a:avLst/>
@@ -3883,18 +3898,18 @@
           <a:noFill/>
         </p:spPr>
         <p:txBody>
-          <a:bodyPr wrap="square" lIns="0" rIns="0" tIns="0" bIns="0" anchor="t">
+          <a:bodyPr wrap="square" lIns="0" rIns="0" tIns="0" bIns="0">
             <a:spAutoFit/>
           </a:bodyPr>
           <a:lstStyle/>
           <a:p>
             <a:pPr algn="ctr"/>
             <a:r>
-              <a:rPr sz="850" b="0">
+              <a:rPr sz="800" b="1">
                 <a:solidFill>
                   <a:srgbClr val="9C36B5"/>
                 </a:solidFill>
-                <a:latin typeface="Arial"/>
+                <a:latin typeface="Architects Daughter"/>
               </a:rPr>
               <a:t>scores</a:t>
             </a:r>
@@ -3909,17 +3924,17 @@
         </p:nvCxnSpPr>
         <p:spPr>
           <a:xfrm>
-            <a:off x="9107424" y="2093976"/>
-            <a:ext cx="347472" cy="0"/>
+            <a:off x="9107424" y="2394458"/>
+            <a:ext cx="475488" cy="0"/>
           </a:xfrm>
           <a:prstGeom prst="line">
             <a:avLst/>
           </a:prstGeom>
-          <a:ln w="28575">
+          <a:ln w="41275">
             <a:solidFill>
               <a:srgbClr val="1E1E1E"/>
             </a:solidFill>
-            <a:tailEnd type="triangle" w="med" len="med"/>
+            <a:tailEnd type="triangle" w="lg" len="lg"/>
           </a:ln>
         </p:spPr>
         <p:style>
@@ -3945,8 +3960,8 @@
         </p:nvSpPr>
         <p:spPr>
           <a:xfrm>
-            <a:off x="8915400" y="1819656"/>
-            <a:ext cx="731520" cy="164592"/>
+            <a:off x="9089136" y="2065274"/>
+            <a:ext cx="512064" cy="182880"/>
           </a:xfrm>
           <a:prstGeom prst="rect">
             <a:avLst/>
@@ -3954,18 +3969,18 @@
           <a:noFill/>
         </p:spPr>
         <p:txBody>
-          <a:bodyPr wrap="square" lIns="0" rIns="0" tIns="0" bIns="0" anchor="t">
+          <a:bodyPr wrap="square" lIns="0" rIns="0" tIns="0" bIns="0">
             <a:spAutoFit/>
           </a:bodyPr>
           <a:lstStyle/>
           <a:p>
             <a:pPr algn="ctr"/>
             <a:r>
-              <a:rPr sz="850" b="0">
+              <a:rPr sz="800" b="1">
                 <a:solidFill>
                   <a:srgbClr val="5C5650"/>
                 </a:solidFill>
-                <a:latin typeface="Arial"/>
+                <a:latin typeface="Architects Daughter"/>
               </a:rPr>
               <a:t>results</a:t>
             </a:r>
@@ -3980,8 +3995,8 @@
         </p:nvSpPr>
         <p:spPr>
           <a:xfrm>
-            <a:off x="384048" y="3474720"/>
-            <a:ext cx="11430000" cy="219456"/>
+            <a:off x="384048" y="3681983"/>
+            <a:ext cx="11430000" cy="310896"/>
           </a:xfrm>
           <a:prstGeom prst="rect">
             <a:avLst/>
@@ -3989,7 +4004,7 @@
           <a:noFill/>
         </p:spPr>
         <p:txBody>
-          <a:bodyPr wrap="square" lIns="0" rIns="0" tIns="0" bIns="0" anchor="t">
+          <a:bodyPr wrap="square" lIns="0" rIns="0" tIns="0" bIns="0">
             <a:spAutoFit/>
           </a:bodyPr>
           <a:lstStyle/>
@@ -3999,7 +4014,7 @@
                 <a:solidFill>
                   <a:srgbClr val="1971C2"/>
                 </a:solidFill>
-                <a:latin typeface="Arial"/>
+                <a:latin typeface="Architects Daughter"/>
               </a:rPr>
               <a:t>FOUR INTERFACE CONTRACTS</a:t>
             </a:r>
@@ -4008,7 +4023,7 @@
                 <a:solidFill>
                   <a:srgbClr val="5C5650"/>
                 </a:solidFill>
-                <a:latin typeface="Arial"/>
+                <a:latin typeface="Architects Daughter"/>
               </a:rPr>
               <a:t>   — agree these before anyone writes code; changing one later costs all four of us</a:t>
             </a:r>
@@ -4023,8 +4038,8 @@
         </p:nvSpPr>
         <p:spPr>
           <a:xfrm>
-            <a:off x="384048" y="3712463"/>
-            <a:ext cx="2724912" cy="1883664"/>
+            <a:off x="384048" y="3956303"/>
+            <a:ext cx="2724912" cy="2032000"/>
           </a:xfrm>
           <a:prstGeom prst="roundRect">
             <a:avLst>
@@ -4065,7 +4080,7 @@
           </a:fontRef>
         </p:style>
         <p:txBody>
-          <a:bodyPr rtlCol="0" anchor="t" wrap="square" tIns="54864" bIns="54864"/>
+          <a:bodyPr rtlCol="0" anchor="t" wrap="square" lIns="100584" rIns="100584" tIns="64008" bIns="64008"/>
           <a:lstStyle/>
           <a:p>
             <a:pPr algn="ctr"/>
@@ -4074,29 +4089,39 @@
                 <a:solidFill>
                   <a:srgbClr val="1971C2"/>
                 </a:solidFill>
-                <a:latin typeface="Arial"/>
+                <a:latin typeface="Architects Daughter"/>
               </a:rPr>
               <a:t>CONTRACT A</a:t>
             </a:r>
           </a:p>
           <a:p>
-            <a:r>
-              <a:rPr sz="1000" b="1">
+            <a:pPr>
+              <a:spcBef>
+                <a:spcPts val="200"/>
+              </a:spcBef>
+            </a:pPr>
+            <a:r>
+              <a:rPr sz="1050" b="1">
                 <a:solidFill>
                   <a:srgbClr val="1E1E1E"/>
                 </a:solidFill>
-                <a:latin typeface="Arial"/>
+                <a:latin typeface="Architects Daughter"/>
               </a:rPr>
               <a:t>Gateway  -&gt;  Bridge</a:t>
             </a:r>
           </a:p>
           <a:p>
+            <a:pPr>
+              <a:spcBef>
+                <a:spcPts val="200"/>
+              </a:spcBef>
+            </a:pPr>
             <a:r>
               <a:rPr sz="800" b="1">
                 <a:solidFill>
                   <a:srgbClr val="1E1E1E"/>
                 </a:solidFill>
-                <a:latin typeface="Arial"/>
+                <a:latin typeface="Architects Daughter"/>
               </a:rPr>
               <a:t>session_id  </a:t>
             </a:r>
@@ -4105,18 +4130,23 @@
                 <a:solidFill>
                   <a:srgbClr val="5C5650"/>
                 </a:solidFill>
-                <a:latin typeface="Arial"/>
+                <a:latin typeface="Architects Daughter"/>
               </a:rPr>
               <a:t>server-issued or HMAC-signed</a:t>
             </a:r>
           </a:p>
           <a:p>
+            <a:pPr>
+              <a:spcBef>
+                <a:spcPts val="200"/>
+              </a:spcBef>
+            </a:pPr>
             <a:r>
               <a:rPr sz="800" b="1">
                 <a:solidFill>
                   <a:srgbClr val="1E1E1E"/>
                 </a:solidFill>
-                <a:latin typeface="Arial"/>
+                <a:latin typeface="Architects Daughter"/>
               </a:rPr>
               <a:t>encoding  </a:t>
             </a:r>
@@ -4125,18 +4155,23 @@
                 <a:solidFill>
                   <a:srgbClr val="5C5650"/>
                 </a:solidFill>
-                <a:latin typeface="Arial"/>
+                <a:latin typeface="Architects Daughter"/>
               </a:rPr>
               <a:t>L16_LE / L16_BE / PCMU / PCMA</a:t>
             </a:r>
           </a:p>
           <a:p>
+            <a:pPr>
+              <a:spcBef>
+                <a:spcPts val="200"/>
+              </a:spcBef>
+            </a:pPr>
             <a:r>
               <a:rPr sz="800" b="1">
                 <a:solidFill>
                   <a:srgbClr val="1E1E1E"/>
                 </a:solidFill>
-                <a:latin typeface="Arial"/>
+                <a:latin typeface="Architects Daughter"/>
               </a:rPr>
               <a:t>sample_rate  </a:t>
             </a:r>
@@ -4145,18 +4180,23 @@
                 <a:solidFill>
                   <a:srgbClr val="5C5650"/>
                 </a:solidFill>
-                <a:latin typeface="Arial"/>
+                <a:latin typeface="Architects Daughter"/>
               </a:rPr>
               <a:t>8000 or 16000 — never assumed</a:t>
             </a:r>
           </a:p>
           <a:p>
+            <a:pPr>
+              <a:spcBef>
+                <a:spcPts val="200"/>
+              </a:spcBef>
+            </a:pPr>
             <a:r>
               <a:rPr sz="800" b="1">
                 <a:solidFill>
                   <a:srgbClr val="1E1E1E"/>
                 </a:solidFill>
-                <a:latin typeface="Arial"/>
+                <a:latin typeface="Architects Daughter"/>
               </a:rPr>
               <a:t>channels + leg  </a:t>
             </a:r>
@@ -4165,18 +4205,23 @@
                 <a:solidFill>
                   <a:srgbClr val="5C5650"/>
                 </a:solidFill>
-                <a:latin typeface="Arial"/>
+                <a:latin typeface="Architects Daughter"/>
               </a:rPr>
               <a:t>mono only; 2 legs = 2 sessions</a:t>
             </a:r>
           </a:p>
           <a:p>
+            <a:pPr>
+              <a:spcBef>
+                <a:spcPts val="200"/>
+              </a:spcBef>
+            </a:pPr>
             <a:r>
               <a:rPr sz="800" b="1">
                 <a:solidFill>
                   <a:srgbClr val="1E1E1E"/>
                 </a:solidFill>
-                <a:latin typeface="Arial"/>
+                <a:latin typeface="Architects Daughter"/>
               </a:rPr>
               <a:t>sample_offset  </a:t>
             </a:r>
@@ -4185,18 +4230,23 @@
                 <a:solidFill>
                   <a:srgbClr val="5C5650"/>
                 </a:solidFill>
-                <a:latin typeface="Arial"/>
+                <a:latin typeface="Architects Daughter"/>
               </a:rPr>
               <a:t>the authoritative clock</a:t>
             </a:r>
           </a:p>
           <a:p>
+            <a:pPr>
+              <a:spcBef>
+                <a:spcPts val="200"/>
+              </a:spcBef>
+            </a:pPr>
             <a:r>
               <a:rPr sz="800" b="1">
                 <a:solidFill>
                   <a:srgbClr val="1E1E1E"/>
                 </a:solidFill>
-                <a:latin typeface="Arial"/>
+                <a:latin typeface="Architects Daughter"/>
               </a:rPr>
               <a:t>concealed  </a:t>
             </a:r>
@@ -4205,18 +4255,23 @@
                 <a:solidFill>
                   <a:srgbClr val="5C5650"/>
                 </a:solidFill>
-                <a:latin typeface="Arial"/>
+                <a:latin typeface="Architects Daughter"/>
               </a:rPr>
               <a:t>true if gateway invented the audio</a:t>
             </a:r>
           </a:p>
           <a:p>
+            <a:pPr>
+              <a:spcBef>
+                <a:spcPts val="200"/>
+              </a:spcBef>
+            </a:pPr>
             <a:r>
               <a:rPr sz="800" b="1">
                 <a:solidFill>
                   <a:srgbClr val="1E1E1E"/>
                 </a:solidFill>
-                <a:latin typeface="Arial"/>
+                <a:latin typeface="Architects Daughter"/>
               </a:rPr>
               <a:t>consent  </a:t>
             </a:r>
@@ -4225,129 +4280,34 @@
                 <a:solidFill>
                   <a:srgbClr val="5C5650"/>
                 </a:solidFill>
-                <a:latin typeface="Arial"/>
+                <a:latin typeface="Architects Daughter"/>
               </a:rPr>
               <a:t>DPDP gate — no consent, no audio</a:t>
             </a:r>
           </a:p>
           <a:p>
+            <a:pPr>
+              <a:spcBef>
+                <a:spcPts val="200"/>
+              </a:spcBef>
+            </a:pPr>
+            <a:r>
+              <a:rPr sz="800" b="1">
+                <a:solidFill>
+                  <a:srgbClr val="1E1E1E"/>
+                </a:solidFill>
+                <a:latin typeface="Architects Daughter"/>
+              </a:rPr>
+              <a:t>OPEN Q  </a:t>
+            </a:r>
             <a:r>
               <a:rPr sz="800" b="0">
                 <a:solidFill>
-                  <a:srgbClr val="1E1E1E"/>
-                </a:solidFill>
-                <a:latin typeface="Arial"/>
-              </a:rPr>
-              <a:t/>
-            </a:r>
-            <a:r>
-              <a:rPr sz="800" b="0">
-                <a:solidFill>
                   <a:srgbClr val="5C5650"/>
                 </a:solidFill>
-                <a:latin typeface="Arial"/>
-              </a:rPr>
-              <a:t/>
-            </a:r>
-          </a:p>
-          <a:p>
-            <a:r>
-              <a:rPr sz="800" b="1">
-                <a:solidFill>
-                  <a:srgbClr val="1E1E1E"/>
-                </a:solidFill>
-                <a:latin typeface="Arial"/>
-              </a:rPr>
-              <a:t>OPEN Q  </a:t>
-            </a:r>
-            <a:r>
-              <a:rPr sz="800" b="0">
-                <a:solidFill>
-                  <a:srgbClr val="5C5650"/>
-                </a:solidFill>
-                <a:latin typeface="Arial"/>
-              </a:rPr>
-              <a:t>is your L16 big- or little-endian?</a:t>
-            </a:r>
-          </a:p>
-          <a:p>
-            <a:r>
-              <a:rPr sz="800" b="0">
-                <a:solidFill>
-                  <a:srgbClr val="1E1E1E"/>
-                </a:solidFill>
-                <a:latin typeface="Arial"/>
-              </a:rPr>
-              <a:t/>
-            </a:r>
-            <a:r>
-              <a:rPr sz="800" b="0">
-                <a:solidFill>
-                  <a:srgbClr val="5C5650"/>
-                </a:solidFill>
-                <a:latin typeface="Arial"/>
-              </a:rPr>
-              <a:t>Byte-swapped PCM is loud noise, and</a:t>
-            </a:r>
-          </a:p>
-          <a:p>
-            <a:r>
-              <a:rPr sz="800" b="0">
-                <a:solidFill>
-                  <a:srgbClr val="1E1E1E"/>
-                </a:solidFill>
-                <a:latin typeface="Arial"/>
-              </a:rPr>
-              <a:t/>
-            </a:r>
-            <a:r>
-              <a:rPr sz="800" b="0">
-                <a:solidFill>
-                  <a:srgbClr val="5C5650"/>
-                </a:solidFill>
-                <a:latin typeface="Arial"/>
-              </a:rPr>
-              <a:t>the detector will confidently call it</a:t>
-            </a:r>
-          </a:p>
-          <a:p>
-            <a:r>
-              <a:rPr sz="800" b="0">
-                <a:solidFill>
-                  <a:srgbClr val="1E1E1E"/>
-                </a:solidFill>
-                <a:latin typeface="Arial"/>
-              </a:rPr>
-              <a:t/>
-            </a:r>
-            <a:r>
-              <a:rPr sz="800" b="0">
-                <a:solidFill>
-                  <a:srgbClr val="5C5650"/>
-                </a:solidFill>
-                <a:latin typeface="Arial"/>
-              </a:rPr>
-              <a:t>synthetic. Validated by a 1 kHz test</a:t>
-            </a:r>
-          </a:p>
-          <a:p>
-            <a:r>
-              <a:rPr sz="800" b="0">
-                <a:solidFill>
-                  <a:srgbClr val="1E1E1E"/>
-                </a:solidFill>
-                <a:latin typeface="Arial"/>
-              </a:rPr>
-              <a:t/>
-            </a:r>
-            <a:r>
-              <a:rPr sz="800" b="0">
-                <a:solidFill>
-                  <a:srgbClr val="5C5650"/>
-                </a:solidFill>
-                <a:latin typeface="Arial"/>
-              </a:rPr>
-              <a:t>tone in the session-open handshake.</a:t>
+                <a:latin typeface="Architects Daughter"/>
+              </a:rPr>
+              <a:t>is your L16 big- or little-endian? Byte-swapped PCM is loud noise and the detector will confidently call it synthetic.</a:t>
             </a:r>
           </a:p>
         </p:txBody>
@@ -4360,8 +4320,8 @@
         </p:nvSpPr>
         <p:spPr>
           <a:xfrm>
-            <a:off x="3255264" y="3712463"/>
-            <a:ext cx="2724912" cy="1883664"/>
+            <a:off x="3255264" y="3956303"/>
+            <a:ext cx="2724912" cy="2032000"/>
           </a:xfrm>
           <a:prstGeom prst="roundRect">
             <a:avLst>
@@ -4402,7 +4362,7 @@
           </a:fontRef>
         </p:style>
         <p:txBody>
-          <a:bodyPr rtlCol="0" anchor="t" wrap="square" tIns="54864" bIns="54864"/>
+          <a:bodyPr rtlCol="0" anchor="t" wrap="square" lIns="100584" rIns="100584" tIns="64008" bIns="64008"/>
           <a:lstStyle/>
           <a:p>
             <a:pPr algn="ctr"/>
@@ -4411,29 +4371,39 @@
                 <a:solidFill>
                   <a:srgbClr val="9C36B5"/>
                 </a:solidFill>
-                <a:latin typeface="Arial"/>
+                <a:latin typeface="Architects Daughter"/>
               </a:rPr>
               <a:t>CONTRACT B</a:t>
             </a:r>
           </a:p>
           <a:p>
-            <a:r>
-              <a:rPr sz="1000" b="1">
+            <a:pPr>
+              <a:spcBef>
+                <a:spcPts val="200"/>
+              </a:spcBef>
+            </a:pPr>
+            <a:r>
+              <a:rPr sz="1050" b="1">
                 <a:solidFill>
                   <a:srgbClr val="1E1E1E"/>
                 </a:solidFill>
-                <a:latin typeface="Arial"/>
-              </a:rPr>
-              <a:t>Bridge  &lt;-&gt;  AI Engine (gRPC)</a:t>
-            </a:r>
-          </a:p>
-          <a:p>
+                <a:latin typeface="Architects Daughter"/>
+              </a:rPr>
+              <a:t>Bridge  &lt;-&gt;  AI Engine</a:t>
+            </a:r>
+          </a:p>
+          <a:p>
+            <a:pPr>
+              <a:spcBef>
+                <a:spcPts val="200"/>
+              </a:spcBef>
+            </a:pPr>
             <a:r>
               <a:rPr sz="800" b="1">
                 <a:solidFill>
                   <a:srgbClr val="1E1E1E"/>
                 </a:solidFill>
-                <a:latin typeface="Arial"/>
+                <a:latin typeface="Architects Daughter"/>
               </a:rPr>
               <a:t>AudioChunk  </a:t>
             </a:r>
@@ -4442,249 +4412,134 @@
                 <a:solidFill>
                   <a:srgbClr val="5C5650"/>
                 </a:solidFill>
-                <a:latin typeface="Arial"/>
-              </a:rPr>
-              <a:t>pcm, window_seq, sample_offset</a:t>
-            </a:r>
-          </a:p>
-          <a:p>
+                <a:latin typeface="Architects Daughter"/>
+              </a:rPr>
+              <a:t>pcm, window_seq, sample_offset, gap_before, partial, session_epoch</a:t>
+            </a:r>
+          </a:p>
+          <a:p>
+            <a:pPr>
+              <a:spcBef>
+                <a:spcPts val="200"/>
+              </a:spcBef>
+            </a:pPr>
+            <a:r>
+              <a:rPr sz="800" b="1">
+                <a:solidFill>
+                  <a:srgbClr val="1E1E1E"/>
+                </a:solidFill>
+                <a:latin typeface="Architects Daughter"/>
+              </a:rPr>
+              <a:t>RiskScoreUpdate  </a:t>
+            </a:r>
             <a:r>
               <a:rPr sz="800" b="0">
                 <a:solidFill>
+                  <a:srgbClr val="5C5650"/>
+                </a:solidFill>
+                <a:latin typeface="Architects Daughter"/>
+              </a:rPr>
+              <a:t>window_seq ECHOED back, model_version, status</a:t>
+            </a:r>
+          </a:p>
+          <a:p>
+            <a:pPr>
+              <a:spcBef>
+                <a:spcPts val="200"/>
+              </a:spcBef>
+            </a:pPr>
+            <a:r>
+              <a:rPr sz="800" b="1">
+                <a:solidFill>
                   <a:srgbClr val="1E1E1E"/>
                 </a:solidFill>
-                <a:latin typeface="Arial"/>
-              </a:rPr>
-              <a:t/>
+                <a:latin typeface="Architects Daughter"/>
+              </a:rPr>
+              <a:t>why echoed  </a:t>
             </a:r>
             <a:r>
               <a:rPr sz="800" b="0">
                 <a:solidFill>
                   <a:srgbClr val="5C5650"/>
                 </a:solidFill>
-                <a:latin typeface="Arial"/>
-              </a:rPr>
-              <a:t>gap_before, partial, session_epoch</a:t>
-            </a:r>
-          </a:p>
-          <a:p>
+                <a:latin typeface="Architects Daughter"/>
+              </a:rPr>
+              <a:t>out-of-order results are otherwise unrecoverable on my side</a:t>
+            </a:r>
+          </a:p>
+          <a:p>
+            <a:pPr>
+              <a:spcBef>
+                <a:spcPts val="200"/>
+              </a:spcBef>
+            </a:pPr>
             <a:r>
               <a:rPr sz="800" b="1">
                 <a:solidFill>
                   <a:srgbClr val="1E1E1E"/>
                 </a:solidFill>
-                <a:latin typeface="Arial"/>
-              </a:rPr>
-              <a:t>RiskScoreUpdate  </a:t>
+                <a:latin typeface="Architects Daughter"/>
+              </a:rPr>
+              <a:t>batch  </a:t>
             </a:r>
             <a:r>
               <a:rPr sz="800" b="0">
                 <a:solidFill>
                   <a:srgbClr val="5C5650"/>
                 </a:solidFill>
-                <a:latin typeface="Arial"/>
-              </a:rPr>
-              <a:t>window_seq ECHOED back</a:t>
-            </a:r>
-          </a:p>
-          <a:p>
+                <a:latin typeface="Architects Daughter"/>
+              </a:rPr>
+              <a:t>always 1 — Dhwani silently collapses batches to one result</a:t>
+            </a:r>
+          </a:p>
+          <a:p>
+            <a:pPr>
+              <a:spcBef>
+                <a:spcPts val="200"/>
+              </a:spcBef>
+            </a:pPr>
+            <a:r>
+              <a:rPr sz="800" b="1">
+                <a:solidFill>
+                  <a:srgbClr val="1E1E1E"/>
+                </a:solidFill>
+                <a:latin typeface="Architects Daughter"/>
+              </a:rPr>
+              <a:t>deadline  </a:t>
+            </a:r>
             <a:r>
               <a:rPr sz="800" b="0">
                 <a:solidFill>
+                  <a:srgbClr val="5C5650"/>
+                </a:solidFill>
+                <a:latin typeface="Architects Daughter"/>
+              </a:rPr>
+              <a:t>400 ms; on breach the window is abandoned, never retried</a:t>
+            </a:r>
+          </a:p>
+          <a:p>
+            <a:pPr>
+              <a:spcBef>
+                <a:spcPts val="200"/>
+              </a:spcBef>
+            </a:pPr>
+            <a:r>
+              <a:rPr sz="800" b="1">
+                <a:solidFill>
                   <a:srgbClr val="1E1E1E"/>
                 </a:solidFill>
-                <a:latin typeface="Arial"/>
-              </a:rPr>
-              <a:t/>
+                <a:latin typeface="Architects Daughter"/>
+              </a:rPr>
+              <a:t>pooling  </a:t>
             </a:r>
             <a:r>
               <a:rPr sz="800" b="0">
                 <a:solidFill>
                   <a:srgbClr val="5C5650"/>
                 </a:solidFill>
-                <a:latin typeface="Arial"/>
-              </a:rPr>
-              <a:t>model_version, status</a:t>
-            </a:r>
-          </a:p>
-          <a:p>
-            <a:r>
-              <a:rPr sz="800" b="1">
-                <a:solidFill>
-                  <a:srgbClr val="1E1E1E"/>
-                </a:solidFill>
-                <a:latin typeface="Arial"/>
-              </a:rPr>
-              <a:t>why echoed  </a:t>
-            </a:r>
-            <a:r>
-              <a:rPr sz="800" b="0">
-                <a:solidFill>
-                  <a:srgbClr val="5C5650"/>
-                </a:solidFill>
-                <a:latin typeface="Arial"/>
-              </a:rPr>
-              <a:t>out-of-order results are otherwise</a:t>
-            </a:r>
-          </a:p>
-          <a:p>
-            <a:r>
-              <a:rPr sz="800" b="0">
-                <a:solidFill>
-                  <a:srgbClr val="1E1E1E"/>
-                </a:solidFill>
-                <a:latin typeface="Arial"/>
-              </a:rPr>
-              <a:t/>
-            </a:r>
-            <a:r>
-              <a:rPr sz="800" b="0">
-                <a:solidFill>
-                  <a:srgbClr val="5C5650"/>
-                </a:solidFill>
-                <a:latin typeface="Arial"/>
-              </a:rPr>
-              <a:t>unrecoverable on my side</a:t>
-            </a:r>
-          </a:p>
-          <a:p>
-            <a:r>
-              <a:rPr sz="800" b="1">
-                <a:solidFill>
-                  <a:srgbClr val="1E1E1E"/>
-                </a:solidFill>
-                <a:latin typeface="Arial"/>
-              </a:rPr>
-              <a:t>batch  </a:t>
-            </a:r>
-            <a:r>
-              <a:rPr sz="800" b="0">
-                <a:solidFill>
-                  <a:srgbClr val="5C5650"/>
-                </a:solidFill>
-                <a:latin typeface="Arial"/>
-              </a:rPr>
-              <a:t>always 1 — Dhwani collapses batches</a:t>
-            </a:r>
-          </a:p>
-          <a:p>
-            <a:r>
-              <a:rPr sz="800" b="0">
-                <a:solidFill>
-                  <a:srgbClr val="1E1E1E"/>
-                </a:solidFill>
-                <a:latin typeface="Arial"/>
-              </a:rPr>
-              <a:t/>
-            </a:r>
-            <a:r>
-              <a:rPr sz="800" b="0">
-                <a:solidFill>
-                  <a:srgbClr val="5C5650"/>
-                </a:solidFill>
-                <a:latin typeface="Arial"/>
-              </a:rPr>
-              <a:t/>
-            </a:r>
-          </a:p>
-          <a:p>
-            <a:r>
-              <a:rPr sz="800" b="1">
-                <a:solidFill>
-                  <a:srgbClr val="1E1E1E"/>
-                </a:solidFill>
-                <a:latin typeface="Arial"/>
-              </a:rPr>
-              <a:t>deadline  </a:t>
-            </a:r>
-            <a:r>
-              <a:rPr sz="800" b="0">
-                <a:solidFill>
-                  <a:srgbClr val="5C5650"/>
-                </a:solidFill>
-                <a:latin typeface="Arial"/>
-              </a:rPr>
-              <a:t>400 ms per window; on breach the</a:t>
-            </a:r>
-          </a:p>
-          <a:p>
-            <a:r>
-              <a:rPr sz="800" b="0">
-                <a:solidFill>
-                  <a:srgbClr val="1E1E1E"/>
-                </a:solidFill>
-                <a:latin typeface="Arial"/>
-              </a:rPr>
-              <a:t/>
-            </a:r>
-            <a:r>
-              <a:rPr sz="800" b="0">
-                <a:solidFill>
-                  <a:srgbClr val="5C5650"/>
-                </a:solidFill>
-                <a:latin typeface="Arial"/>
-              </a:rPr>
-              <a:t>window is ABANDONED, never retried —</a:t>
-            </a:r>
-          </a:p>
-          <a:p>
-            <a:r>
-              <a:rPr sz="800" b="0">
-                <a:solidFill>
-                  <a:srgbClr val="1E1E1E"/>
-                </a:solidFill>
-                <a:latin typeface="Arial"/>
-              </a:rPr>
-              <a:t/>
-            </a:r>
-            <a:r>
-              <a:rPr sz="800" b="0">
-                <a:solidFill>
-                  <a:srgbClr val="5C5650"/>
-                </a:solidFill>
-                <a:latin typeface="Arial"/>
-              </a:rPr>
-              <a:t>a late score is worthless and the</a:t>
-            </a:r>
-          </a:p>
-          <a:p>
-            <a:r>
-              <a:rPr sz="800" b="0">
-                <a:solidFill>
-                  <a:srgbClr val="1E1E1E"/>
-                </a:solidFill>
-                <a:latin typeface="Arial"/>
-              </a:rPr>
-              <a:t/>
-            </a:r>
-            <a:r>
-              <a:rPr sz="800" b="0">
-                <a:solidFill>
-                  <a:srgbClr val="5C5650"/>
-                </a:solidFill>
-                <a:latin typeface="Arial"/>
-              </a:rPr>
-              <a:t>retry steals capacity from fresh audio.</a:t>
-            </a:r>
-          </a:p>
-          <a:p>
-            <a:r>
-              <a:rPr sz="800" b="1">
-                <a:solidFill>
-                  <a:srgbClr val="1E1E1E"/>
-                </a:solidFill>
-                <a:latin typeface="Arial"/>
-              </a:rPr>
-              <a:t>pooling  </a:t>
-            </a:r>
-            <a:r>
-              <a:rPr sz="800" b="0">
-                <a:solidFill>
-                  <a:srgbClr val="5C5650"/>
-                </a:solidFill>
-                <a:latin typeface="Arial"/>
-              </a:rPr>
-              <a:t>80 streams/conn (HTTP/2 caps at 100)</a:t>
+                <a:latin typeface="Architects Daughter"/>
+              </a:rPr>
+              <a:t>80 streams/conn — HTTP/2 caps at 100</a:t>
             </a:r>
           </a:p>
         </p:txBody>
@@ -4697,8 +4552,8 @@
         </p:nvSpPr>
         <p:spPr>
           <a:xfrm>
-            <a:off x="6126480" y="3712463"/>
-            <a:ext cx="2724912" cy="1883664"/>
+            <a:off x="6126480" y="3956303"/>
+            <a:ext cx="2724912" cy="2032000"/>
           </a:xfrm>
           <a:prstGeom prst="roundRect">
             <a:avLst>
@@ -4739,7 +4594,7 @@
           </a:fontRef>
         </p:style>
         <p:txBody>
-          <a:bodyPr rtlCol="0" anchor="t" wrap="square" tIns="54864" bIns="54864"/>
+          <a:bodyPr rtlCol="0" anchor="t" wrap="square" lIns="100584" rIns="100584" tIns="64008" bIns="64008"/>
           <a:lstStyle/>
           <a:p>
             <a:pPr algn="ctr"/>
@@ -4748,29 +4603,39 @@
                 <a:solidFill>
                   <a:srgbClr val="2F9E44"/>
                 </a:solidFill>
-                <a:latin typeface="Arial"/>
+                <a:latin typeface="Architects Daughter"/>
               </a:rPr>
               <a:t>CONTRACT C</a:t>
             </a:r>
           </a:p>
           <a:p>
-            <a:r>
-              <a:rPr sz="1000" b="1">
+            <a:pPr>
+              <a:spcBef>
+                <a:spcPts val="200"/>
+              </a:spcBef>
+            </a:pPr>
+            <a:r>
+              <a:rPr sz="1050" b="1">
                 <a:solidFill>
                   <a:srgbClr val="1E1E1E"/>
                 </a:solidFill>
-                <a:latin typeface="Arial"/>
+                <a:latin typeface="Architects Daughter"/>
               </a:rPr>
               <a:t>Bridge  -&gt;  Risk Engine</a:t>
             </a:r>
           </a:p>
           <a:p>
+            <a:pPr>
+              <a:spcBef>
+                <a:spcPts val="200"/>
+              </a:spcBef>
+            </a:pPr>
             <a:r>
               <a:rPr sz="800" b="1">
                 <a:solidFill>
                   <a:srgbClr val="1E1E1E"/>
                 </a:solidFill>
-                <a:latin typeface="Arial"/>
+                <a:latin typeface="Architects Daughter"/>
               </a:rPr>
               <a:t>ordering  </a:t>
             </a:r>
@@ -4779,18 +4644,23 @@
                 <a:solidFill>
                   <a:srgbClr val="5C5650"/>
                 </a:solidFill>
-                <a:latin typeface="Arial"/>
+                <a:latin typeface="Architects Daughter"/>
               </a:rPr>
               <a:t>monotonic window_seq, deduplicated</a:t>
             </a:r>
           </a:p>
           <a:p>
+            <a:pPr>
+              <a:spcBef>
+                <a:spcPts val="200"/>
+              </a:spcBef>
+            </a:pPr>
             <a:r>
               <a:rPr sz="800" b="1">
                 <a:solidFill>
                   <a:srgbClr val="1E1E1E"/>
                 </a:solidFill>
-                <a:latin typeface="Arial"/>
+                <a:latin typeface="Architects Daughter"/>
               </a:rPr>
               <a:t>gaps  </a:t>
             </a:r>
@@ -4799,18 +4669,23 @@
                 <a:solidFill>
                   <a:srgbClr val="5C5650"/>
                 </a:solidFill>
-                <a:latin typeface="Arial"/>
-              </a:rPr>
-              <a:t>gap_before=true resets smoothing</a:t>
-            </a:r>
-          </a:p>
-          <a:p>
+                <a:latin typeface="Architects Daughter"/>
+              </a:rPr>
+              <a:t>gap_before=true resets any smoothing</a:t>
+            </a:r>
+          </a:p>
+          <a:p>
+            <a:pPr>
+              <a:spcBef>
+                <a:spcPts val="200"/>
+              </a:spcBef>
+            </a:pPr>
             <a:r>
               <a:rPr sz="800" b="1">
                 <a:solidFill>
                   <a:srgbClr val="1E1E1E"/>
                 </a:solidFill>
-                <a:latin typeface="Arial"/>
+                <a:latin typeface="Architects Daughter"/>
               </a:rPr>
               <a:t>status  </a:t>
             </a:r>
@@ -4819,207 +4694,82 @@
                 <a:solidFill>
                   <a:srgbClr val="5C5650"/>
                 </a:solidFill>
-                <a:latin typeface="Arial"/>
-              </a:rPr>
-              <a:t>OK / SKIPPED_SILENCE / DEGRADED</a:t>
-            </a:r>
-          </a:p>
-          <a:p>
+                <a:latin typeface="Architects Daughter"/>
+              </a:rPr>
+              <a:t>OK / SKIPPED_SILENCE / DEGRADED / DETECTOR_UNAVAILABLE</a:t>
+            </a:r>
+          </a:p>
+          <a:p>
+            <a:pPr>
+              <a:spcBef>
+                <a:spcPts val="200"/>
+              </a:spcBef>
+            </a:pPr>
+            <a:r>
+              <a:rPr sz="800" b="1">
+                <a:solidFill>
+                  <a:srgbClr val="1E1E1E"/>
+                </a:solidFill>
+                <a:latin typeface="Architects Daughter"/>
+              </a:rPr>
+              <a:t>critical  </a:t>
+            </a:r>
             <a:r>
               <a:rPr sz="800" b="0">
                 <a:solidFill>
+                  <a:srgbClr val="5C5650"/>
+                </a:solidFill>
+                <a:latin typeface="Architects Daughter"/>
+              </a:rPr>
+              <a:t>a missing signal must renormalise, never be substituted with 0.0</a:t>
+            </a:r>
+          </a:p>
+          <a:p>
+            <a:pPr>
+              <a:spcBef>
+                <a:spcPts val="200"/>
+              </a:spcBef>
+            </a:pPr>
+            <a:r>
+              <a:rPr sz="800" b="1">
+                <a:solidFill>
                   <a:srgbClr val="1E1E1E"/>
                 </a:solidFill>
-                <a:latin typeface="Arial"/>
-              </a:rPr>
-              <a:t/>
+                <a:latin typeface="Architects Daughter"/>
+              </a:rPr>
+              <a:t>OPEN Q  </a:t>
             </a:r>
             <a:r>
               <a:rPr sz="800" b="0">
                 <a:solidFill>
                   <a:srgbClr val="5C5650"/>
                 </a:solidFill>
-                <a:latin typeface="Arial"/>
-              </a:rPr>
-              <a:t>/ DETECTOR_UNAVAILABLE</a:t>
-            </a:r>
-          </a:p>
-          <a:p>
+                <a:latin typeface="Architects Daughter"/>
+              </a:rPr>
+              <a:t>on DETECTOR_UNAVAILABLE do you renormalise or hold the last score?</a:t>
+            </a:r>
+          </a:p>
+          <a:p>
+            <a:pPr>
+              <a:spcBef>
+                <a:spcPts val="200"/>
+              </a:spcBef>
+            </a:pPr>
             <a:r>
               <a:rPr sz="800" b="1">
                 <a:solidFill>
                   <a:srgbClr val="1E1E1E"/>
                 </a:solidFill>
-                <a:latin typeface="Arial"/>
-              </a:rPr>
-              <a:t>critical  </a:t>
+                <a:latin typeface="Architects Daughter"/>
+              </a:rPr>
+              <a:t>cadence  </a:t>
             </a:r>
             <a:r>
               <a:rPr sz="800" b="0">
                 <a:solidFill>
                   <a:srgbClr val="5C5650"/>
                 </a:solidFill>
-                <a:latin typeface="Arial"/>
-              </a:rPr>
-              <a:t>a missing signal must renormalise,</a:t>
-            </a:r>
-          </a:p>
-          <a:p>
-            <a:r>
-              <a:rPr sz="800" b="0">
-                <a:solidFill>
-                  <a:srgbClr val="1E1E1E"/>
-                </a:solidFill>
-                <a:latin typeface="Arial"/>
-              </a:rPr>
-              <a:t/>
-            </a:r>
-            <a:r>
-              <a:rPr sz="800" b="0">
-                <a:solidFill>
-                  <a:srgbClr val="5C5650"/>
-                </a:solidFill>
-                <a:latin typeface="Arial"/>
-              </a:rPr>
-              <a:t>never be substituted with 0.0</a:t>
-            </a:r>
-          </a:p>
-          <a:p>
-            <a:r>
-              <a:rPr sz="800" b="1">
-                <a:solidFill>
-                  <a:srgbClr val="1E1E1E"/>
-                </a:solidFill>
-                <a:latin typeface="Arial"/>
-              </a:rPr>
-              <a:t>model_version  </a:t>
-            </a:r>
-            <a:r>
-              <a:rPr sz="800" b="0">
-                <a:solidFill>
-                  <a:srgbClr val="5C5650"/>
-                </a:solidFill>
-                <a:latin typeface="Arial"/>
-              </a:rPr>
-              <a:t>never mix versions in one call</a:t>
-            </a:r>
-          </a:p>
-          <a:p>
-            <a:r>
-              <a:rPr sz="800" b="0">
-                <a:solidFill>
-                  <a:srgbClr val="1E1E1E"/>
-                </a:solidFill>
-                <a:latin typeface="Arial"/>
-              </a:rPr>
-              <a:t/>
-            </a:r>
-            <a:r>
-              <a:rPr sz="800" b="0">
-                <a:solidFill>
-                  <a:srgbClr val="5C5650"/>
-                </a:solidFill>
-                <a:latin typeface="Arial"/>
-              </a:rPr>
-              <a:t/>
-            </a:r>
-          </a:p>
-          <a:p>
-            <a:r>
-              <a:rPr sz="800" b="1">
-                <a:solidFill>
-                  <a:srgbClr val="1E1E1E"/>
-                </a:solidFill>
-                <a:latin typeface="Arial"/>
-              </a:rPr>
-              <a:t>OPEN Q  </a:t>
-            </a:r>
-            <a:r>
-              <a:rPr sz="800" b="0">
-                <a:solidFill>
-                  <a:srgbClr val="5C5650"/>
-                </a:solidFill>
-                <a:latin typeface="Arial"/>
-              </a:rPr>
-              <a:t>on DETECTOR_UNAVAILABLE, do you</a:t>
-            </a:r>
-          </a:p>
-          <a:p>
-            <a:r>
-              <a:rPr sz="800" b="0">
-                <a:solidFill>
-                  <a:srgbClr val="1E1E1E"/>
-                </a:solidFill>
-                <a:latin typeface="Arial"/>
-              </a:rPr>
-              <a:t/>
-            </a:r>
-            <a:r>
-              <a:rPr sz="800" b="0">
-                <a:solidFill>
-                  <a:srgbClr val="5C5650"/>
-                </a:solidFill>
-                <a:latin typeface="Arial"/>
-              </a:rPr>
-              <a:t>renormalise over remaining signals or</a:t>
-            </a:r>
-          </a:p>
-          <a:p>
-            <a:r>
-              <a:rPr sz="800" b="0">
-                <a:solidFill>
-                  <a:srgbClr val="1E1E1E"/>
-                </a:solidFill>
-                <a:latin typeface="Arial"/>
-              </a:rPr>
-              <a:t/>
-            </a:r>
-            <a:r>
-              <a:rPr sz="800" b="0">
-                <a:solidFill>
-                  <a:srgbClr val="5C5650"/>
-                </a:solidFill>
-                <a:latin typeface="Arial"/>
-              </a:rPr>
-              <a:t>hold the last score? Treating a missing</a:t>
-            </a:r>
-          </a:p>
-          <a:p>
-            <a:r>
-              <a:rPr sz="800" b="0">
-                <a:solidFill>
-                  <a:srgbClr val="1E1E1E"/>
-                </a:solidFill>
-                <a:latin typeface="Arial"/>
-              </a:rPr>
-              <a:t/>
-            </a:r>
-            <a:r>
-              <a:rPr sz="800" b="0">
-                <a:solidFill>
-                  <a:srgbClr val="5C5650"/>
-                </a:solidFill>
-                <a:latin typeface="Arial"/>
-              </a:rPr>
-              <a:t>signal as 0.0 fabricates fraud signal.</a:t>
-            </a:r>
-          </a:p>
-          <a:p>
-            <a:r>
-              <a:rPr sz="800" b="1">
-                <a:solidFill>
-                  <a:srgbClr val="1E1E1E"/>
-                </a:solidFill>
-                <a:latin typeface="Arial"/>
-              </a:rPr>
-              <a:t>cadence  </a:t>
-            </a:r>
-            <a:r>
-              <a:rPr sz="800" b="0">
-                <a:solidFill>
-                  <a:srgbClr val="5C5650"/>
-                </a:solidFill>
-                <a:latin typeface="Arial"/>
+                <a:latin typeface="Architects Daughter"/>
               </a:rPr>
               <a:t>10 scores/sec at L0, fewer when degraded</a:t>
             </a:r>
@@ -5034,8 +4784,8 @@
         </p:nvSpPr>
         <p:spPr>
           <a:xfrm>
-            <a:off x="8997696" y="3712463"/>
-            <a:ext cx="2724912" cy="1883664"/>
+            <a:off x="8997696" y="3956303"/>
+            <a:ext cx="2724912" cy="2032000"/>
           </a:xfrm>
           <a:prstGeom prst="roundRect">
             <a:avLst>
@@ -5076,7 +4826,7 @@
           </a:fontRef>
         </p:style>
         <p:txBody>
-          <a:bodyPr rtlCol="0" anchor="t" wrap="square" tIns="54864" bIns="54864"/>
+          <a:bodyPr rtlCol="0" anchor="t" wrap="square" lIns="100584" rIns="100584" tIns="64008" bIns="64008"/>
           <a:lstStyle/>
           <a:p>
             <a:pPr algn="ctr"/>
@@ -5085,29 +4835,39 @@
                 <a:solidFill>
                   <a:srgbClr val="F08C00"/>
                 </a:solidFill>
-                <a:latin typeface="Arial"/>
+                <a:latin typeface="Architects Daughter"/>
               </a:rPr>
               <a:t>CONTRACT D</a:t>
             </a:r>
           </a:p>
           <a:p>
-            <a:r>
-              <a:rPr sz="1000" b="1">
+            <a:pPr>
+              <a:spcBef>
+                <a:spcPts val="200"/>
+              </a:spcBef>
+            </a:pPr>
+            <a:r>
+              <a:rPr sz="1050" b="1">
                 <a:solidFill>
                   <a:srgbClr val="1E1E1E"/>
                 </a:solidFill>
-                <a:latin typeface="Arial"/>
+                <a:latin typeface="Architects Daughter"/>
               </a:rPr>
               <a:t>Bridge  -&gt;  Dashboard</a:t>
             </a:r>
           </a:p>
           <a:p>
+            <a:pPr>
+              <a:spcBef>
+                <a:spcPts val="200"/>
+              </a:spcBef>
+            </a:pPr>
             <a:r>
               <a:rPr sz="800" b="1">
                 <a:solidFill>
                   <a:srgbClr val="1E1E1E"/>
                 </a:solidFill>
-                <a:latin typeface="Arial"/>
+                <a:latin typeface="Architects Daughter"/>
               </a:rPr>
               <a:t>transport  </a:t>
             </a:r>
@@ -5116,18 +4876,23 @@
                 <a:solidFill>
                   <a:srgbClr val="5C5650"/>
                 </a:solidFill>
-                <a:latin typeface="Arial"/>
+                <a:latin typeface="Architects Daughter"/>
               </a:rPr>
               <a:t>best-effort WebSocket</a:t>
             </a:r>
           </a:p>
           <a:p>
+            <a:pPr>
+              <a:spcBef>
+                <a:spcPts val="200"/>
+              </a:spcBef>
+            </a:pPr>
             <a:r>
               <a:rPr sz="800" b="1">
                 <a:solidFill>
                   <a:srgbClr val="1E1E1E"/>
                 </a:solidFill>
-                <a:latin typeface="Arial"/>
+                <a:latin typeface="Architects Daughter"/>
               </a:rPr>
               <a:t>delivery  </a:t>
             </a:r>
@@ -5136,18 +4901,23 @@
                 <a:solidFill>
                   <a:srgbClr val="5C5650"/>
                 </a:solidFill>
-                <a:latin typeface="Arial"/>
+                <a:latin typeface="Architects Daughter"/>
               </a:rPr>
               <a:t>lossy by design</a:t>
             </a:r>
           </a:p>
           <a:p>
+            <a:pPr>
+              <a:spcBef>
+                <a:spcPts val="200"/>
+              </a:spcBef>
+            </a:pPr>
             <a:r>
               <a:rPr sz="800" b="1">
                 <a:solidFill>
                   <a:srgbClr val="1E1E1E"/>
                 </a:solidFill>
-                <a:latin typeface="Arial"/>
+                <a:latin typeface="Architects Daughter"/>
               </a:rPr>
               <a:t>rule  </a:t>
             </a:r>
@@ -5156,209 +4926,84 @@
                 <a:solidFill>
                   <a:srgbClr val="5C5650"/>
                 </a:solidFill>
-                <a:latin typeface="Arial"/>
-              </a:rPr>
-              <a:t>never in the critical path</a:t>
-            </a:r>
-          </a:p>
-          <a:p>
+                <a:latin typeface="Architects Daughter"/>
+              </a:rPr>
+              <a:t>never in the critical path; must never apply backpressure that reaches audio</a:t>
+            </a:r>
+          </a:p>
+          <a:p>
+            <a:pPr>
+              <a:spcBef>
+                <a:spcPts val="200"/>
+              </a:spcBef>
+            </a:pPr>
+            <a:r>
+              <a:rPr sz="800" b="1">
+                <a:solidFill>
+                  <a:srgbClr val="1E1E1E"/>
+                </a:solidFill>
+                <a:latin typeface="Architects Daughter"/>
+              </a:rPr>
+              <a:t>why lossy  </a:t>
+            </a:r>
             <a:r>
               <a:rPr sz="800" b="0">
                 <a:solidFill>
+                  <a:srgbClr val="5C5650"/>
+                </a:solidFill>
+                <a:latin typeface="Architects Daughter"/>
+              </a:rPr>
+              <a:t>a dashboard that can slow the audio path is a dashboard that can drop fraud detection</a:t>
+            </a:r>
+          </a:p>
+          <a:p>
+            <a:pPr>
+              <a:spcBef>
+                <a:spcPts val="200"/>
+              </a:spcBef>
+            </a:pPr>
+            <a:r>
+              <a:rPr sz="800" b="1">
+                <a:solidFill>
                   <a:srgbClr val="1E1E1E"/>
                 </a:solidFill>
-                <a:latin typeface="Arial"/>
-              </a:rPr>
-              <a:t/>
+                <a:latin typeface="Architects Daughter"/>
+              </a:rPr>
+              <a:t>reconnect  </a:t>
             </a:r>
             <a:r>
               <a:rPr sz="800" b="0">
                 <a:solidFill>
                   <a:srgbClr val="5C5650"/>
                 </a:solidFill>
-                <a:latin typeface="Arial"/>
-              </a:rPr>
-              <a:t>must never apply backpressure</a:t>
-            </a:r>
-          </a:p>
-          <a:p>
+                <a:latin typeface="Architects Daughter"/>
+              </a:rPr>
+              <a:t>client resumes, no server state</a:t>
+            </a:r>
+          </a:p>
+          <a:p>
+            <a:pPr>
+              <a:spcBef>
+                <a:spcPts val="200"/>
+              </a:spcBef>
+            </a:pPr>
+            <a:r>
+              <a:rPr sz="800" b="1">
+                <a:solidFill>
+                  <a:srgbClr val="1E1E1E"/>
+                </a:solidFill>
+                <a:latin typeface="Architects Daughter"/>
+              </a:rPr>
+              <a:t>cardinality  </a:t>
+            </a:r>
             <a:r>
               <a:rPr sz="800" b="0">
                 <a:solidFill>
-                  <a:srgbClr val="1E1E1E"/>
-                </a:solidFill>
-                <a:latin typeface="Arial"/>
-              </a:rPr>
-              <a:t/>
-            </a:r>
-            <a:r>
-              <a:rPr sz="800" b="0">
-                <a:solidFill>
                   <a:srgbClr val="5C5650"/>
                 </a:solidFill>
-                <a:latin typeface="Arial"/>
-              </a:rPr>
-              <a:t>that reaches the audio path</a:t>
-            </a:r>
-          </a:p>
-          <a:p>
-            <a:r>
-              <a:rPr sz="800" b="1">
-                <a:solidFill>
-                  <a:srgbClr val="1E1E1E"/>
-                </a:solidFill>
-                <a:latin typeface="Arial"/>
-              </a:rPr>
-              <a:t>reconnect  </a:t>
-            </a:r>
-            <a:r>
-              <a:rPr sz="800" b="0">
-                <a:solidFill>
-                  <a:srgbClr val="5C5650"/>
-                </a:solidFill>
-                <a:latin typeface="Arial"/>
-              </a:rPr>
-              <a:t>client resumes, no server state</a:t>
-            </a:r>
-          </a:p>
-          <a:p>
-            <a:r>
-              <a:rPr sz="800" b="1">
-                <a:solidFill>
-                  <a:srgbClr val="1E1E1E"/>
-                </a:solidFill>
-                <a:latin typeface="Arial"/>
-              </a:rPr>
-              <a:t>cardinality  </a:t>
-            </a:r>
-            <a:r>
-              <a:rPr sz="800" b="0">
-                <a:solidFill>
-                  <a:srgbClr val="5C5650"/>
-                </a:solidFill>
-                <a:latin typeface="Arial"/>
+                <a:latin typeface="Architects Daughter"/>
               </a:rPr>
               <a:t>no per-session metric labels</a:t>
-            </a:r>
-          </a:p>
-          <a:p>
-            <a:r>
-              <a:rPr sz="800" b="0">
-                <a:solidFill>
-                  <a:srgbClr val="1E1E1E"/>
-                </a:solidFill>
-                <a:latin typeface="Arial"/>
-              </a:rPr>
-              <a:t/>
-            </a:r>
-            <a:r>
-              <a:rPr sz="800" b="0">
-                <a:solidFill>
-                  <a:srgbClr val="5C5650"/>
-                </a:solidFill>
-                <a:latin typeface="Arial"/>
-              </a:rPr>
-              <a:t/>
-            </a:r>
-          </a:p>
-          <a:p>
-            <a:r>
-              <a:rPr sz="800" b="1">
-                <a:solidFill>
-                  <a:srgbClr val="1E1E1E"/>
-                </a:solidFill>
-                <a:latin typeface="Arial"/>
-              </a:rPr>
-              <a:t>why lossy  </a:t>
-            </a:r>
-            <a:r>
-              <a:rPr sz="800" b="0">
-                <a:solidFill>
-                  <a:srgbClr val="5C5650"/>
-                </a:solidFill>
-                <a:latin typeface="Arial"/>
-              </a:rPr>
-              <a:t>a dashboard that can slow the audio</a:t>
-            </a:r>
-          </a:p>
-          <a:p>
-            <a:r>
-              <a:rPr sz="800" b="0">
-                <a:solidFill>
-                  <a:srgbClr val="1E1E1E"/>
-                </a:solidFill>
-                <a:latin typeface="Arial"/>
-              </a:rPr>
-              <a:t/>
-            </a:r>
-            <a:r>
-              <a:rPr sz="800" b="0">
-                <a:solidFill>
-                  <a:srgbClr val="5C5650"/>
-                </a:solidFill>
-                <a:latin typeface="Arial"/>
-              </a:rPr>
-              <a:t>path is a dashboard that can drop</a:t>
-            </a:r>
-          </a:p>
-          <a:p>
-            <a:r>
-              <a:rPr sz="800" b="0">
-                <a:solidFill>
-                  <a:srgbClr val="1E1E1E"/>
-                </a:solidFill>
-                <a:latin typeface="Arial"/>
-              </a:rPr>
-              <a:t/>
-            </a:r>
-            <a:r>
-              <a:rPr sz="800" b="0">
-                <a:solidFill>
-                  <a:srgbClr val="5C5650"/>
-                </a:solidFill>
-                <a:latin typeface="Arial"/>
-              </a:rPr>
-              <a:t>fraud detection. It gets best-effort</a:t>
-            </a:r>
-          </a:p>
-          <a:p>
-            <a:r>
-              <a:rPr sz="800" b="0">
-                <a:solidFill>
-                  <a:srgbClr val="1E1E1E"/>
-                </a:solidFill>
-                <a:latin typeface="Arial"/>
-              </a:rPr>
-              <a:t/>
-            </a:r>
-            <a:r>
-              <a:rPr sz="800" b="0">
-                <a:solidFill>
-                  <a:srgbClr val="5C5650"/>
-                </a:solidFill>
-                <a:latin typeface="Arial"/>
-              </a:rPr>
-              <a:t>delivery and no guarantees, forever.</a:t>
-            </a:r>
-          </a:p>
-          <a:p>
-            <a:r>
-              <a:rPr sz="800" b="1">
-                <a:solidFill>
-                  <a:srgbClr val="1E1E1E"/>
-                </a:solidFill>
-                <a:latin typeface="Arial"/>
-              </a:rPr>
-              <a:t>payload  </a:t>
-            </a:r>
-            <a:r>
-              <a:rPr sz="800" b="0">
-                <a:solidFill>
-                  <a:srgbClr val="5C5650"/>
-                </a:solidFill>
-                <a:latin typeface="Arial"/>
-              </a:rPr>
-              <a:t>score, status, model_version, seq</a:t>
             </a:r>
           </a:p>
         </p:txBody>
@@ -5371,8 +5016,8 @@
         </p:nvSpPr>
         <p:spPr>
           <a:xfrm>
-            <a:off x="384048" y="5724144"/>
-            <a:ext cx="11420856" cy="585216"/>
+            <a:off x="384048" y="6134608"/>
+            <a:ext cx="11420856" cy="478028"/>
           </a:xfrm>
           <a:prstGeom prst="roundRect">
             <a:avLst>
@@ -5413,7 +5058,7 @@
           </a:fontRef>
         </p:style>
         <p:txBody>
-          <a:bodyPr rtlCol="0" anchor="ctr" wrap="square" tIns="54864" bIns="54864"/>
+          <a:bodyPr rtlCol="0" anchor="ctr" wrap="square" lIns="100584" rIns="100584" tIns="64008" bIns="64008"/>
           <a:lstStyle/>
           <a:p>
             <a:pPr algn="ctr"/>
@@ -5422,7 +5067,7 @@
                 <a:solidFill>
                   <a:srgbClr val="E03131"/>
                 </a:solidFill>
-                <a:latin typeface="Arial"/>
+                <a:latin typeface="Architects Daughter"/>
               </a:rPr>
               <a:t>CORE CONSTRAINT   </a:t>
             </a:r>
@@ -5431,18 +5076,23 @@
                 <a:solidFill>
                   <a:srgbClr val="1E1E1E"/>
                 </a:solidFill>
-                <a:latin typeface="Arial"/>
+                <a:latin typeface="Architects Daughter"/>
               </a:rPr>
               <a:t>Every other service in this system can tell its upstream to slow down. A phone call cannot be paused.</a:t>
             </a:r>
           </a:p>
           <a:p>
-            <a:r>
-              <a:rPr sz="950" b="0">
+            <a:pPr>
+              <a:spcBef>
+                <a:spcPts val="200"/>
+              </a:spcBef>
+            </a:pPr>
+            <a:r>
+              <a:rPr sz="900" b="0">
                 <a:solidFill>
                   <a:srgbClr val="5C5650"/>
                 </a:solidFill>
-                <a:latin typeface="Arial"/>
+                <a:latin typeface="Architects Daughter"/>
               </a:rPr>
               <a:t>Everything else — the ring buffer, the drop-oldest policy, the adaptive hop, the whole degradation ladder — is a consequence of that one fact.</a:t>
             </a:r>
@@ -5475,8 +5125,8 @@
         </p:nvSpPr>
         <p:spPr>
           <a:xfrm>
-            <a:off x="384048" y="146304"/>
-            <a:ext cx="11430000" cy="402336"/>
+            <a:off x="384048" y="128016"/>
+            <a:ext cx="11430000" cy="531368"/>
           </a:xfrm>
           <a:prstGeom prst="rect">
             <a:avLst/>
@@ -5484,26 +5134,26 @@
           <a:noFill/>
         </p:spPr>
         <p:txBody>
-          <a:bodyPr wrap="square" lIns="0" rIns="0" tIns="0" bIns="0" anchor="t">
+          <a:bodyPr wrap="square" lIns="0" rIns="0" tIns="0" bIns="0">
             <a:spAutoFit/>
           </a:bodyPr>
           <a:lstStyle/>
           <a:p>
             <a:r>
-              <a:rPr sz="2500" b="1">
+              <a:rPr sz="2400" b="1">
                 <a:solidFill>
                   <a:srgbClr val="1E1E1E"/>
                 </a:solidFill>
-                <a:latin typeface="Arial"/>
+                <a:latin typeface="Architects Daughter"/>
               </a:rPr>
               <a:t>Inside the Bridge</a:t>
             </a:r>
             <a:r>
-              <a:rPr sz="2500" b="0">
+              <a:rPr sz="2400" b="0">
                 <a:solidFill>
                   <a:srgbClr val="1971C2"/>
                 </a:solidFill>
-                <a:latin typeface="Arial"/>
+                <a:latin typeface="Architects Daughter"/>
               </a:rPr>
               <a:t>  —  Eight Stages, One Timeline</a:t>
             </a:r>
@@ -5518,8 +5168,8 @@
         </p:nvSpPr>
         <p:spPr>
           <a:xfrm>
-            <a:off x="384048" y="566928"/>
-            <a:ext cx="11430000" cy="237744"/>
+            <a:off x="384048" y="695960"/>
+            <a:ext cx="11430000" cy="318770"/>
           </a:xfrm>
           <a:prstGeom prst="rect">
             <a:avLst/>
@@ -5527,17 +5177,17 @@
           <a:noFill/>
         </p:spPr>
         <p:txBody>
-          <a:bodyPr wrap="square" lIns="0" rIns="0" tIns="0" bIns="0" anchor="t">
+          <a:bodyPr wrap="square" lIns="0" rIns="0" tIns="0" bIns="0">
             <a:spAutoFit/>
           </a:bodyPr>
           <a:lstStyle/>
           <a:p>
             <a:r>
-              <a:rPr sz="1100">
+              <a:rPr sz="1050" b="0">
                 <a:solidFill>
                   <a:srgbClr val="5C5650"/>
                 </a:solidFill>
-                <a:latin typeface="Arial"/>
+                <a:latin typeface="Architects Daughter"/>
               </a:rPr>
               <a:t>N dissimilar transports become one canonical PCM timeline; that timeline becomes fixed windows the model was trained to expect.</a:t>
             </a:r>
@@ -5552,8 +5202,8 @@
         </p:nvSpPr>
         <p:spPr>
           <a:xfrm>
-            <a:off x="384048" y="1060704"/>
-            <a:ext cx="1920240" cy="859536"/>
+            <a:off x="384048" y="1142746"/>
+            <a:ext cx="1783080" cy="1104900"/>
           </a:xfrm>
           <a:prstGeom prst="roundRect">
             <a:avLst>
@@ -5563,7 +5213,7 @@
           <a:solidFill>
             <a:srgbClr val="FFFFFF"/>
           </a:solidFill>
-          <a:ln w="22225">
+          <a:ln w="25400">
             <a:solidFill>
               <a:srgbClr val="1E1E1E"/>
             </a:solidFill>
@@ -5594,7 +5244,7 @@
           </a:fontRef>
         </p:style>
         <p:txBody>
-          <a:bodyPr rtlCol="0" anchor="ctr" wrap="square" tIns="54864" bIns="54864"/>
+          <a:bodyPr rtlCol="0" anchor="ctr" wrap="square" lIns="100584" rIns="100584" tIns="64008" bIns="64008"/>
           <a:lstStyle/>
           <a:p>
             <a:pPr algn="ctr"/>
@@ -5603,34 +5253,39 @@
                 <a:solidFill>
                   <a:srgbClr val="1E1E1E"/>
                 </a:solidFill>
-                <a:latin typeface="Arial"/>
+                <a:latin typeface="Architects Daughter"/>
               </a:rPr>
               <a:t>FreeSWITCH</a:t>
             </a:r>
           </a:p>
           <a:p>
-            <a:pPr>
-              <a:spcBef>
-                <a:spcPts val="200"/>
-              </a:spcBef>
-            </a:pPr>
-            <a:r>
-              <a:rPr sz="750" b="0">
+            <a:pPr algn="ctr">
+              <a:spcBef>
+                <a:spcPts val="200"/>
+              </a:spcBef>
+            </a:pPr>
+            <a:r>
+              <a:rPr sz="800" b="0">
                 <a:solidFill>
                   <a:srgbClr val="5C5650"/>
                 </a:solidFill>
-                <a:latin typeface="Arial"/>
+                <a:latin typeface="Architects Daughter"/>
               </a:rPr>
               <a:t>WebSocket · L16 binary</a:t>
             </a:r>
           </a:p>
           <a:p>
-            <a:r>
-              <a:rPr sz="750" b="0">
+            <a:pPr algn="ctr">
+              <a:spcBef>
+                <a:spcPts val="200"/>
+              </a:spcBef>
+            </a:pPr>
+            <a:r>
+              <a:rPr sz="800" b="0">
                 <a:solidFill>
                   <a:srgbClr val="5C5650"/>
                 </a:solidFill>
-                <a:latin typeface="Arial"/>
+                <a:latin typeface="Architects Daughter"/>
               </a:rPr>
               <a:t>8 or 16 kHz · primary path</a:t>
             </a:r>
@@ -5645,8 +5300,8 @@
         </p:nvSpPr>
         <p:spPr>
           <a:xfrm>
-            <a:off x="384048" y="2029967"/>
-            <a:ext cx="1920240" cy="859536"/>
+            <a:off x="384048" y="2430526"/>
+            <a:ext cx="1783080" cy="1104900"/>
           </a:xfrm>
           <a:prstGeom prst="roundRect">
             <a:avLst>
@@ -5656,7 +5311,7 @@
           <a:solidFill>
             <a:srgbClr val="FFFFFF"/>
           </a:solidFill>
-          <a:ln w="22225">
+          <a:ln w="25400">
             <a:solidFill>
               <a:srgbClr val="1E1E1E"/>
             </a:solidFill>
@@ -5687,7 +5342,7 @@
           </a:fontRef>
         </p:style>
         <p:txBody>
-          <a:bodyPr rtlCol="0" anchor="ctr" wrap="square" tIns="54864" bIns="54864"/>
+          <a:bodyPr rtlCol="0" anchor="ctr" wrap="square" lIns="100584" rIns="100584" tIns="64008" bIns="64008"/>
           <a:lstStyle/>
           <a:p>
             <a:pPr algn="ctr"/>
@@ -5696,34 +5351,39 @@
                 <a:solidFill>
                   <a:srgbClr val="1E1E1E"/>
                 </a:solidFill>
-                <a:latin typeface="Arial"/>
+                <a:latin typeface="Architects Daughter"/>
               </a:rPr>
               <a:t>Asterisk</a:t>
             </a:r>
           </a:p>
           <a:p>
-            <a:pPr>
-              <a:spcBef>
-                <a:spcPts val="200"/>
-              </a:spcBef>
-            </a:pPr>
-            <a:r>
-              <a:rPr sz="750" b="0">
+            <a:pPr algn="ctr">
+              <a:spcBef>
+                <a:spcPts val="200"/>
+              </a:spcBef>
+            </a:pPr>
+            <a:r>
+              <a:rPr sz="800" b="0">
                 <a:solidFill>
                   <a:srgbClr val="5C5650"/>
                 </a:solidFill>
-                <a:latin typeface="Arial"/>
+                <a:latin typeface="Architects Daughter"/>
               </a:rPr>
               <a:t>TCP · AudioSocket</a:t>
             </a:r>
           </a:p>
           <a:p>
-            <a:r>
-              <a:rPr sz="750" b="0">
+            <a:pPr algn="ctr">
+              <a:spcBef>
+                <a:spcPts val="200"/>
+              </a:spcBef>
+            </a:pPr>
+            <a:r>
+              <a:rPr sz="800" b="0">
                 <a:solidFill>
                   <a:srgbClr val="5C5650"/>
                 </a:solidFill>
-                <a:latin typeface="Arial"/>
+                <a:latin typeface="Architects Daughter"/>
               </a:rPr>
               <a:t>length-prefixed framing</a:t>
             </a:r>
@@ -5738,8 +5398,8 @@
         </p:nvSpPr>
         <p:spPr>
           <a:xfrm>
-            <a:off x="384048" y="2999232"/>
-            <a:ext cx="1920240" cy="859536"/>
+            <a:off x="384048" y="3718305"/>
+            <a:ext cx="1783080" cy="1104900"/>
           </a:xfrm>
           <a:prstGeom prst="roundRect">
             <a:avLst>
@@ -5749,7 +5409,7 @@
           <a:solidFill>
             <a:srgbClr val="FFFFFF"/>
           </a:solidFill>
-          <a:ln w="22225">
+          <a:ln w="25400">
             <a:solidFill>
               <a:srgbClr val="1E1E1E"/>
             </a:solidFill>
@@ -5780,7 +5440,7 @@
           </a:fontRef>
         </p:style>
         <p:txBody>
-          <a:bodyPr rtlCol="0" anchor="ctr" wrap="square" tIns="54864" bIns="54864"/>
+          <a:bodyPr rtlCol="0" anchor="ctr" wrap="square" lIns="100584" rIns="100584" tIns="64008" bIns="64008"/>
           <a:lstStyle/>
           <a:p>
             <a:pPr algn="ctr"/>
@@ -5789,34 +5449,39 @@
                 <a:solidFill>
                   <a:srgbClr val="1E1E1E"/>
                 </a:solidFill>
-                <a:latin typeface="Arial"/>
+                <a:latin typeface="Architects Daughter"/>
               </a:rPr>
               <a:t>Twilio</a:t>
             </a:r>
           </a:p>
           <a:p>
-            <a:pPr>
-              <a:spcBef>
-                <a:spcPts val="200"/>
-              </a:spcBef>
-            </a:pPr>
-            <a:r>
-              <a:rPr sz="750" b="0">
+            <a:pPr algn="ctr">
+              <a:spcBef>
+                <a:spcPts val="200"/>
+              </a:spcBef>
+            </a:pPr>
+            <a:r>
+              <a:rPr sz="800" b="0">
                 <a:solidFill>
                   <a:srgbClr val="5C5650"/>
                 </a:solidFill>
-                <a:latin typeface="Arial"/>
+                <a:latin typeface="Architects Daughter"/>
               </a:rPr>
               <a:t>WSS · base64 JSON</a:t>
             </a:r>
           </a:p>
           <a:p>
-            <a:r>
-              <a:rPr sz="750" b="0">
+            <a:pPr algn="ctr">
+              <a:spcBef>
+                <a:spcPts val="200"/>
+              </a:spcBef>
+            </a:pPr>
+            <a:r>
+              <a:rPr sz="800" b="0">
                 <a:solidFill>
                   <a:srgbClr val="5C5650"/>
                 </a:solidFill>
-                <a:latin typeface="Arial"/>
+                <a:latin typeface="Architects Daughter"/>
               </a:rPr>
               <a:t>G.711 mu-law 8 kHz</a:t>
             </a:r>
@@ -5831,8 +5496,8 @@
         </p:nvSpPr>
         <p:spPr>
           <a:xfrm>
-            <a:off x="2706624" y="1060704"/>
-            <a:ext cx="1673352" cy="1828800"/>
+            <a:off x="2697480" y="1243330"/>
+            <a:ext cx="1435608" cy="2064004"/>
           </a:xfrm>
           <a:prstGeom prst="roundRect">
             <a:avLst>
@@ -5842,7 +5507,7 @@
           <a:solidFill>
             <a:srgbClr val="A5D8FF"/>
           </a:solidFill>
-          <a:ln w="34925">
+          <a:ln w="38100">
             <a:solidFill>
               <a:srgbClr val="1971C2"/>
             </a:solidFill>
@@ -5873,7 +5538,7 @@
           </a:fontRef>
         </p:style>
         <p:txBody>
-          <a:bodyPr rtlCol="0" anchor="t" wrap="square" tIns="54864" bIns="54864"/>
+          <a:bodyPr rtlCol="0" anchor="t" wrap="square" lIns="100584" rIns="100584" tIns="64008" bIns="64008"/>
           <a:lstStyle/>
           <a:p>
             <a:pPr algn="ctr"/>
@@ -5882,75 +5547,89 @@
                 <a:solidFill>
                   <a:srgbClr val="1971C2"/>
                 </a:solidFill>
-                <a:latin typeface="Arial"/>
-              </a:rPr>
-              <a:t>INGRESS</a:t>
-            </a:r>
-          </a:p>
-          <a:p>
-            <a:r>
-              <a:rPr sz="1050" b="1">
-                <a:solidFill>
-                  <a:srgbClr val="1971C2"/>
-                </a:solidFill>
-                <a:latin typeface="Arial"/>
-              </a:rPr>
-              <a:t>ADAPTERS</a:t>
-            </a:r>
-          </a:p>
-          <a:p>
-            <a:r>
-              <a:rPr sz="750" b="1">
+                <a:latin typeface="Architects Daughter"/>
+              </a:rPr>
+              <a:t>INGRESS ADAPTERS</a:t>
+            </a:r>
+          </a:p>
+          <a:p>
+            <a:pPr algn="ctr">
+              <a:spcBef>
+                <a:spcPts val="200"/>
+              </a:spcBef>
+            </a:pPr>
+            <a:r>
+              <a:rPr sz="800" b="1">
                 <a:solidFill>
                   <a:srgbClr val="1E1E1E"/>
                 </a:solidFill>
-                <a:latin typeface="Arial"/>
+                <a:latin typeface="Architects Daughter"/>
               </a:rPr>
               <a:t>N formats -&gt; 1 frame</a:t>
             </a:r>
           </a:p>
           <a:p>
-            <a:r>
-              <a:rPr sz="750" b="0">
+            <a:pPr algn="ctr">
+              <a:spcBef>
+                <a:spcPts val="200"/>
+              </a:spcBef>
+            </a:pPr>
+            <a:r>
+              <a:rPr sz="800" b="0">
                 <a:solidFill>
                   <a:srgbClr val="5C5650"/>
                 </a:solidFill>
-                <a:latin typeface="Arial"/>
+                <a:latin typeface="Architects Daughter"/>
               </a:rPr>
               <a:t>decode · mono · 16 kHz</a:t>
             </a:r>
           </a:p>
           <a:p>
-            <a:r>
-              <a:rPr sz="750" b="0">
+            <a:pPr algn="ctr">
+              <a:spcBef>
+                <a:spcPts val="200"/>
+              </a:spcBef>
+            </a:pPr>
+            <a:r>
+              <a:rPr sz="800" b="0">
                 <a:solidFill>
                   <a:srgbClr val="5C5650"/>
                 </a:solidFill>
-                <a:latin typeface="Arial"/>
+                <a:latin typeface="Architects Daughter"/>
               </a:rPr>
               <a:t>soxr VHQ resample</a:t>
             </a:r>
           </a:p>
           <a:p>
-            <a:r>
-              <a:rPr sz="750" b="0">
+            <a:pPr algn="ctr">
+              <a:spcBef>
+                <a:spcPts val="200"/>
+              </a:spcBef>
+            </a:pPr>
+            <a:r>
+              <a:rPr sz="800" b="0">
                 <a:solidFill>
                   <a:srgbClr val="5C5650"/>
                 </a:solidFill>
-                <a:latin typeface="Arial"/>
+                <a:latin typeface="Architects Daughter"/>
               </a:rPr>
               <a:t>endianness validated</a:t>
             </a:r>
           </a:p>
           <a:p>
-            <a:r>
-              <a:rPr sz="750" b="0">
+            <a:pPr algn="ctr">
+              <a:spcBef>
+                <a:spcPts val="200"/>
+              </a:spcBef>
+            </a:pPr>
+            <a:r>
+              <a:rPr sz="800" b="0">
                 <a:solidFill>
                   <a:srgbClr val="5C5650"/>
                 </a:solidFill>
-                <a:latin typeface="Arial"/>
-              </a:rPr>
-              <a:t>identical to training path</a:t>
+                <a:latin typeface="Architects Daughter"/>
+              </a:rPr>
+              <a:t>same path as training</a:t>
             </a:r>
           </a:p>
         </p:txBody>
@@ -5963,17 +5642,17 @@
         </p:nvCxnSpPr>
         <p:spPr>
           <a:xfrm>
-            <a:off x="4398264" y="1975104"/>
-            <a:ext cx="146304" cy="0"/>
+            <a:off x="4178808" y="2275332"/>
+            <a:ext cx="384048" cy="0"/>
           </a:xfrm>
           <a:prstGeom prst="line">
             <a:avLst/>
           </a:prstGeom>
-          <a:ln w="28575">
+          <a:ln w="38100">
             <a:solidFill>
               <a:srgbClr val="1E1E1E"/>
             </a:solidFill>
-            <a:tailEnd type="triangle" w="med" len="med"/>
+            <a:tailEnd type="triangle" w="lg" len="lg"/>
           </a:ln>
         </p:spPr>
         <p:style>
@@ -5999,8 +5678,8 @@
         </p:nvSpPr>
         <p:spPr>
           <a:xfrm>
-            <a:off x="4562856" y="1060704"/>
-            <a:ext cx="1673352" cy="1828800"/>
+            <a:off x="4608576" y="1243330"/>
+            <a:ext cx="1435608" cy="2064004"/>
           </a:xfrm>
           <a:prstGeom prst="roundRect">
             <a:avLst>
@@ -6010,7 +5689,7 @@
           <a:solidFill>
             <a:srgbClr val="A5D8FF"/>
           </a:solidFill>
-          <a:ln w="34925">
+          <a:ln w="38100">
             <a:solidFill>
               <a:srgbClr val="1971C2"/>
             </a:solidFill>
@@ -6041,7 +5720,7 @@
           </a:fontRef>
         </p:style>
         <p:txBody>
-          <a:bodyPr rtlCol="0" anchor="t" wrap="square" tIns="54864" bIns="54864"/>
+          <a:bodyPr rtlCol="0" anchor="t" wrap="square" lIns="100584" rIns="100584" tIns="64008" bIns="64008"/>
           <a:lstStyle/>
           <a:p>
             <a:pPr algn="ctr"/>
@@ -6050,73 +5729,87 @@
                 <a:solidFill>
                   <a:srgbClr val="1971C2"/>
                 </a:solidFill>
-                <a:latin typeface="Arial"/>
-              </a:rPr>
-              <a:t>SESSION</a:t>
-            </a:r>
-          </a:p>
-          <a:p>
-            <a:r>
-              <a:rPr sz="1050" b="1">
-                <a:solidFill>
-                  <a:srgbClr val="1971C2"/>
-                </a:solidFill>
-                <a:latin typeface="Arial"/>
-              </a:rPr>
-              <a:t>MANAGER</a:t>
-            </a:r>
-          </a:p>
-          <a:p>
-            <a:r>
-              <a:rPr sz="750" b="1">
+                <a:latin typeface="Architects Daughter"/>
+              </a:rPr>
+              <a:t>SESSION MANAGER</a:t>
+            </a:r>
+          </a:p>
+          <a:p>
+            <a:pPr algn="ctr">
+              <a:spcBef>
+                <a:spcPts val="200"/>
+              </a:spcBef>
+            </a:pPr>
+            <a:r>
+              <a:rPr sz="800" b="1">
                 <a:solidFill>
                   <a:srgbClr val="1E1E1E"/>
                 </a:solidFill>
-                <a:latin typeface="Arial"/>
+                <a:latin typeface="Architects Daughter"/>
               </a:rPr>
               <a:t>lifecycle + fencing</a:t>
             </a:r>
           </a:p>
           <a:p>
-            <a:r>
-              <a:rPr sz="750" b="0">
+            <a:pPr algn="ctr">
+              <a:spcBef>
+                <a:spcPts val="200"/>
+              </a:spcBef>
+            </a:pPr>
+            <a:r>
+              <a:rPr sz="800" b="0">
                 <a:solidFill>
                   <a:srgbClr val="5C5650"/>
                 </a:solidFill>
-                <a:latin typeface="Arial"/>
+                <a:latin typeface="Architects Daughter"/>
               </a:rPr>
               <a:t>Redis epoch token</a:t>
             </a:r>
           </a:p>
           <a:p>
-            <a:r>
-              <a:rPr sz="750" b="0">
+            <a:pPr algn="ctr">
+              <a:spcBef>
+                <a:spcPts val="200"/>
+              </a:spcBef>
+            </a:pPr>
+            <a:r>
+              <a:rPr sz="800" b="0">
                 <a:solidFill>
                   <a:srgbClr val="5C5650"/>
                 </a:solidFill>
-                <a:latin typeface="Arial"/>
+                <a:latin typeface="Architects Daughter"/>
               </a:rPr>
               <a:t>consent gate (DPDP)</a:t>
             </a:r>
           </a:p>
           <a:p>
-            <a:r>
-              <a:rPr sz="750" b="0">
+            <a:pPr algn="ctr">
+              <a:spcBef>
+                <a:spcPts val="200"/>
+              </a:spcBef>
+            </a:pPr>
+            <a:r>
+              <a:rPr sz="800" b="0">
                 <a:solidFill>
                   <a:srgbClr val="5C5650"/>
                 </a:solidFill>
-                <a:latin typeface="Arial"/>
+                <a:latin typeface="Architects Daughter"/>
               </a:rPr>
               <a:t>resume within 15 s</a:t>
             </a:r>
           </a:p>
           <a:p>
-            <a:r>
-              <a:rPr sz="750" b="0">
+            <a:pPr algn="ctr">
+              <a:spcBef>
+                <a:spcPts val="200"/>
+              </a:spcBef>
+            </a:pPr>
+            <a:r>
+              <a:rPr sz="800" b="0">
                 <a:solidFill>
                   <a:srgbClr val="5C5650"/>
                 </a:solidFill>
-                <a:latin typeface="Arial"/>
+                <a:latin typeface="Architects Daughter"/>
               </a:rPr>
               <a:t>2nd claimant rejected</a:t>
             </a:r>
@@ -6131,17 +5824,17 @@
         </p:nvCxnSpPr>
         <p:spPr>
           <a:xfrm>
-            <a:off x="6254496" y="1975104"/>
-            <a:ext cx="146304" cy="0"/>
+            <a:off x="6089904" y="2275332"/>
+            <a:ext cx="384048" cy="0"/>
           </a:xfrm>
           <a:prstGeom prst="line">
             <a:avLst/>
           </a:prstGeom>
-          <a:ln w="28575">
+          <a:ln w="38100">
             <a:solidFill>
               <a:srgbClr val="1E1E1E"/>
             </a:solidFill>
-            <a:tailEnd type="triangle" w="med" len="med"/>
+            <a:tailEnd type="triangle" w="lg" len="lg"/>
           </a:ln>
         </p:spPr>
         <p:style>
@@ -6167,8 +5860,8 @@
         </p:nvSpPr>
         <p:spPr>
           <a:xfrm>
-            <a:off x="6419088" y="1060704"/>
-            <a:ext cx="1673352" cy="1828800"/>
+            <a:off x="6519672" y="1243330"/>
+            <a:ext cx="1435608" cy="2064004"/>
           </a:xfrm>
           <a:prstGeom prst="roundRect">
             <a:avLst>
@@ -6178,7 +5871,7 @@
           <a:solidFill>
             <a:srgbClr val="A5D8FF"/>
           </a:solidFill>
-          <a:ln w="34925">
+          <a:ln w="38100">
             <a:solidFill>
               <a:srgbClr val="1971C2"/>
             </a:solidFill>
@@ -6209,7 +5902,7 @@
           </a:fontRef>
         </p:style>
         <p:txBody>
-          <a:bodyPr rtlCol="0" anchor="t" wrap="square" tIns="54864" bIns="54864"/>
+          <a:bodyPr rtlCol="0" anchor="t" wrap="square" lIns="100584" rIns="100584" tIns="64008" bIns="64008"/>
           <a:lstStyle/>
           <a:p>
             <a:pPr algn="ctr"/>
@@ -6218,73 +5911,87 @@
                 <a:solidFill>
                   <a:srgbClr val="1971C2"/>
                 </a:solidFill>
-                <a:latin typeface="Arial"/>
-              </a:rPr>
-              <a:t>RING</a:t>
-            </a:r>
-          </a:p>
-          <a:p>
-            <a:r>
-              <a:rPr sz="1050" b="1">
-                <a:solidFill>
-                  <a:srgbClr val="1971C2"/>
-                </a:solidFill>
-                <a:latin typeface="Arial"/>
-              </a:rPr>
-              <a:t>BUFFER</a:t>
-            </a:r>
-          </a:p>
-          <a:p>
-            <a:r>
-              <a:rPr sz="750" b="1">
+                <a:latin typeface="Architects Daughter"/>
+              </a:rPr>
+              <a:t>RING BUFFER</a:t>
+            </a:r>
+          </a:p>
+          <a:p>
+            <a:pPr algn="ctr">
+              <a:spcBef>
+                <a:spcPts val="200"/>
+              </a:spcBef>
+            </a:pPr>
+            <a:r>
+              <a:rPr sz="800" b="1">
                 <a:solidFill>
                   <a:srgbClr val="1E1E1E"/>
                 </a:solidFill>
-                <a:latin typeface="Arial"/>
+                <a:latin typeface="Architects Daughter"/>
               </a:rPr>
               <a:t>bounded 256 KB</a:t>
             </a:r>
           </a:p>
           <a:p>
-            <a:r>
-              <a:rPr sz="750" b="0">
+            <a:pPr algn="ctr">
+              <a:spcBef>
+                <a:spcPts val="200"/>
+              </a:spcBef>
+            </a:pPr>
+            <a:r>
+              <a:rPr sz="800" b="0">
                 <a:solidFill>
                   <a:srgbClr val="5C5650"/>
                 </a:solidFill>
-                <a:latin typeface="Arial"/>
+                <a:latin typeface="Architects Daughter"/>
               </a:rPr>
               <a:t>jitter absorb 60 ms</a:t>
             </a:r>
           </a:p>
           <a:p>
-            <a:r>
-              <a:rPr sz="750" b="0">
+            <a:pPr algn="ctr">
+              <a:spcBef>
+                <a:spcPts val="200"/>
+              </a:spcBef>
+            </a:pPr>
+            <a:r>
+              <a:rPr sz="800" b="0">
                 <a:solidFill>
                   <a:srgbClr val="5C5650"/>
                 </a:solidFill>
-                <a:latin typeface="Arial"/>
+                <a:latin typeface="Architects Daughter"/>
               </a:rPr>
               <a:t>drop OLDEST on full</a:t>
             </a:r>
           </a:p>
           <a:p>
-            <a:r>
-              <a:rPr sz="750" b="0">
+            <a:pPr algn="ctr">
+              <a:spcBef>
+                <a:spcPts val="200"/>
+              </a:spcBef>
+            </a:pPr>
+            <a:r>
+              <a:rPr sz="800" b="0">
                 <a:solidFill>
                   <a:srgbClr val="5C5650"/>
                 </a:solidFill>
-                <a:latin typeface="Arial"/>
+                <a:latin typeface="Architects Daughter"/>
               </a:rPr>
               <a:t>never blocks ingest</a:t>
             </a:r>
           </a:p>
           <a:p>
-            <a:r>
-              <a:rPr sz="750" b="0">
+            <a:pPr algn="ctr">
+              <a:spcBef>
+                <a:spcPts val="200"/>
+              </a:spcBef>
+            </a:pPr>
+            <a:r>
+              <a:rPr sz="800" b="0">
                 <a:solidFill>
                   <a:srgbClr val="5C5650"/>
                 </a:solidFill>
-                <a:latin typeface="Arial"/>
+                <a:latin typeface="Architects Daughter"/>
               </a:rPr>
               <a:t>1 producer, 1 consumer</a:t>
             </a:r>
@@ -6299,17 +6006,17 @@
         </p:nvCxnSpPr>
         <p:spPr>
           <a:xfrm>
-            <a:off x="8110728" y="1975104"/>
-            <a:ext cx="146304" cy="0"/>
+            <a:off x="8001000" y="2275332"/>
+            <a:ext cx="384047" cy="0"/>
           </a:xfrm>
           <a:prstGeom prst="line">
             <a:avLst/>
           </a:prstGeom>
-          <a:ln w="28575">
+          <a:ln w="38100">
             <a:solidFill>
               <a:srgbClr val="1E1E1E"/>
             </a:solidFill>
-            <a:tailEnd type="triangle" w="med" len="med"/>
+            <a:tailEnd type="triangle" w="lg" len="lg"/>
           </a:ln>
         </p:spPr>
         <p:style>
@@ -6335,8 +6042,8 @@
         </p:nvSpPr>
         <p:spPr>
           <a:xfrm>
-            <a:off x="8275320" y="1060704"/>
-            <a:ext cx="1673352" cy="1828800"/>
+            <a:off x="8430767" y="1243330"/>
+            <a:ext cx="1435608" cy="2064004"/>
           </a:xfrm>
           <a:prstGeom prst="roundRect">
             <a:avLst>
@@ -6346,7 +6053,7 @@
           <a:solidFill>
             <a:srgbClr val="A5D8FF"/>
           </a:solidFill>
-          <a:ln w="34925">
+          <a:ln w="38100">
             <a:solidFill>
               <a:srgbClr val="1971C2"/>
             </a:solidFill>
@@ -6377,7 +6084,7 @@
           </a:fontRef>
         </p:style>
         <p:txBody>
-          <a:bodyPr rtlCol="0" anchor="t" wrap="square" tIns="54864" bIns="54864"/>
+          <a:bodyPr rtlCol="0" anchor="t" wrap="square" lIns="100584" rIns="100584" tIns="64008" bIns="64008"/>
           <a:lstStyle/>
           <a:p>
             <a:pPr algn="ctr"/>
@@ -6386,64 +6093,89 @@
                 <a:solidFill>
                   <a:srgbClr val="1971C2"/>
                 </a:solidFill>
-                <a:latin typeface="Arial"/>
+                <a:latin typeface="Architects Daughter"/>
               </a:rPr>
               <a:t>WINDOWER</a:t>
             </a:r>
           </a:p>
           <a:p>
-            <a:r>
-              <a:rPr sz="750" b="1">
+            <a:pPr algn="ctr">
+              <a:spcBef>
+                <a:spcPts val="200"/>
+              </a:spcBef>
+            </a:pPr>
+            <a:r>
+              <a:rPr sz="800" b="1">
                 <a:solidFill>
                   <a:srgbClr val="1E1E1E"/>
                 </a:solidFill>
-                <a:latin typeface="Arial"/>
+                <a:latin typeface="Architects Daughter"/>
               </a:rPr>
               <a:t>2.0 s / 100 ms hop</a:t>
             </a:r>
           </a:p>
           <a:p>
-            <a:r>
-              <a:rPr sz="750" b="0">
+            <a:pPr algn="ctr">
+              <a:spcBef>
+                <a:spcPts val="200"/>
+              </a:spcBef>
+            </a:pPr>
+            <a:r>
+              <a:rPr sz="800" b="0">
                 <a:solidFill>
                   <a:srgbClr val="5C5650"/>
                 </a:solidFill>
-                <a:latin typeface="Arial"/>
+                <a:latin typeface="Architects Daughter"/>
               </a:rPr>
               <a:t>sample-accurate</a:t>
             </a:r>
           </a:p>
           <a:p>
-            <a:r>
-              <a:rPr sz="750" b="0">
+            <a:pPr algn="ctr">
+              <a:spcBef>
+                <a:spcPts val="200"/>
+              </a:spcBef>
+            </a:pPr>
+            <a:r>
+              <a:rPr sz="800" b="0">
                 <a:solidFill>
                   <a:srgbClr val="5C5650"/>
                 </a:solidFill>
-                <a:latin typeface="Arial"/>
+                <a:latin typeface="Architects Daughter"/>
               </a:rPr>
               <a:t>VAD-gated (~40% saved)</a:t>
             </a:r>
           </a:p>
           <a:p>
-            <a:r>
-              <a:rPr sz="750" b="0">
+            <a:pPr algn="ctr">
+              <a:spcBef>
+                <a:spcPts val="200"/>
+              </a:spcBef>
+            </a:pPr>
+            <a:r>
+              <a:rPr sz="800" b="0">
                 <a:solidFill>
                   <a:srgbClr val="5C5650"/>
                 </a:solidFill>
-                <a:latin typeface="Arial"/>
-              </a:rPr>
-              <a:t>len from checkpoint</a:t>
-            </a:r>
-          </a:p>
-          <a:p>
-            <a:r>
-              <a:rPr sz="750" b="0">
+                <a:latin typeface="Architects Daughter"/>
+              </a:rPr>
+              <a:t>length from checkpoint</a:t>
+            </a:r>
+          </a:p>
+          <a:p>
+            <a:pPr algn="ctr">
+              <a:spcBef>
+                <a:spcPts val="200"/>
+              </a:spcBef>
+            </a:pPr>
+            <a:r>
+              <a:rPr sz="800" b="0">
                 <a:solidFill>
                   <a:srgbClr val="5C5650"/>
                 </a:solidFill>
-                <a:latin typeface="Arial"/>
-              </a:rPr>
-              <a:t>hop by samples, not frames</a:t>
+                <a:latin typeface="Architects Daughter"/>
+              </a:rPr>
+              <a:t>hop by samples</a:t>
             </a:r>
           </a:p>
         </p:txBody>
@@ -6456,17 +6188,17 @@
         </p:nvCxnSpPr>
         <p:spPr>
           <a:xfrm>
-            <a:off x="9966960" y="1975104"/>
-            <a:ext cx="146304" cy="0"/>
+            <a:off x="9912096" y="2275332"/>
+            <a:ext cx="384047" cy="0"/>
           </a:xfrm>
           <a:prstGeom prst="line">
             <a:avLst/>
           </a:prstGeom>
-          <a:ln w="28575">
+          <a:ln w="38100">
             <a:solidFill>
               <a:srgbClr val="1E1E1E"/>
             </a:solidFill>
-            <a:tailEnd type="triangle" w="med" len="med"/>
+            <a:tailEnd type="triangle" w="lg" len="lg"/>
           </a:ln>
         </p:spPr>
         <p:style>
@@ -6492,8 +6224,8 @@
         </p:nvSpPr>
         <p:spPr>
           <a:xfrm>
-            <a:off x="10131552" y="1060704"/>
-            <a:ext cx="1673352" cy="1828800"/>
+            <a:off x="10341863" y="1243330"/>
+            <a:ext cx="1435608" cy="2064004"/>
           </a:xfrm>
           <a:prstGeom prst="roundRect">
             <a:avLst>
@@ -6503,7 +6235,7 @@
           <a:solidFill>
             <a:srgbClr val="EEBEFA"/>
           </a:solidFill>
-          <a:ln w="34925">
+          <a:ln w="38100">
             <a:solidFill>
               <a:srgbClr val="9C36B5"/>
             </a:solidFill>
@@ -6534,7 +6266,7 @@
           </a:fontRef>
         </p:style>
         <p:txBody>
-          <a:bodyPr rtlCol="0" anchor="t" wrap="square" tIns="54864" bIns="54864"/>
+          <a:bodyPr rtlCol="0" anchor="t" wrap="square" lIns="100584" rIns="100584" tIns="64008" bIns="64008"/>
           <a:lstStyle/>
           <a:p>
             <a:pPr algn="ctr"/>
@@ -6543,73 +6275,87 @@
                 <a:solidFill>
                   <a:srgbClr val="9C36B5"/>
                 </a:solidFill>
-                <a:latin typeface="Arial"/>
-              </a:rPr>
-              <a:t>gRPC</a:t>
-            </a:r>
-          </a:p>
-          <a:p>
-            <a:r>
-              <a:rPr sz="1050" b="1">
-                <a:solidFill>
-                  <a:srgbClr val="9C36B5"/>
-                </a:solidFill>
-                <a:latin typeface="Arial"/>
-              </a:rPr>
-              <a:t>POOL</a:t>
-            </a:r>
-          </a:p>
-          <a:p>
-            <a:r>
-              <a:rPr sz="750" b="1">
+                <a:latin typeface="Architects Daughter"/>
+              </a:rPr>
+              <a:t>gRPC POOL</a:t>
+            </a:r>
+          </a:p>
+          <a:p>
+            <a:pPr algn="ctr">
+              <a:spcBef>
+                <a:spcPts val="200"/>
+              </a:spcBef>
+            </a:pPr>
+            <a:r>
+              <a:rPr sz="800" b="1">
                 <a:solidFill>
                   <a:srgbClr val="1E1E1E"/>
                 </a:solidFill>
-                <a:latin typeface="Arial"/>
-              </a:rPr>
-              <a:t>bidi stream, batch=1</a:t>
-            </a:r>
-          </a:p>
-          <a:p>
-            <a:r>
-              <a:rPr sz="750" b="0">
+                <a:latin typeface="Architects Daughter"/>
+              </a:rPr>
+              <a:t>bidi stream · batch=1</a:t>
+            </a:r>
+          </a:p>
+          <a:p>
+            <a:pPr algn="ctr">
+              <a:spcBef>
+                <a:spcPts val="200"/>
+              </a:spcBef>
+            </a:pPr>
+            <a:r>
+              <a:rPr sz="800" b="0">
                 <a:solidFill>
                   <a:srgbClr val="5C5650"/>
                 </a:solidFill>
-                <a:latin typeface="Arial"/>
-              </a:rPr>
-              <a:t>conn pool: 80 streams</a:t>
-            </a:r>
-          </a:p>
-          <a:p>
-            <a:r>
-              <a:rPr sz="750" b="0">
+                <a:latin typeface="Architects Daughter"/>
+              </a:rPr>
+              <a:t>80 streams per conn</a:t>
+            </a:r>
+          </a:p>
+          <a:p>
+            <a:pPr algn="ctr">
+              <a:spcBef>
+                <a:spcPts val="200"/>
+              </a:spcBef>
+            </a:pPr>
+            <a:r>
+              <a:rPr sz="800" b="0">
                 <a:solidFill>
                   <a:srgbClr val="5C5650"/>
                 </a:solidFill>
-                <a:latin typeface="Arial"/>
+                <a:latin typeface="Architects Daughter"/>
               </a:rPr>
               <a:t>400 ms deadline</a:t>
             </a:r>
           </a:p>
           <a:p>
-            <a:r>
-              <a:rPr sz="750" b="0">
+            <a:pPr algn="ctr">
+              <a:spcBef>
+                <a:spcPts val="200"/>
+              </a:spcBef>
+            </a:pPr>
+            <a:r>
+              <a:rPr sz="800" b="0">
                 <a:solidFill>
                   <a:srgbClr val="5C5650"/>
                 </a:solidFill>
-                <a:latin typeface="Arial"/>
+                <a:latin typeface="Architects Daughter"/>
               </a:rPr>
               <a:t>retry on NEW stream</a:t>
             </a:r>
           </a:p>
           <a:p>
-            <a:r>
-              <a:rPr sz="750" b="0">
+            <a:pPr algn="ctr">
+              <a:spcBef>
+                <a:spcPts val="200"/>
+              </a:spcBef>
+            </a:pPr>
+            <a:r>
+              <a:rPr sz="800" b="0">
                 <a:solidFill>
                   <a:srgbClr val="5C5650"/>
                 </a:solidFill>
-                <a:latin typeface="Arial"/>
+                <a:latin typeface="Architects Daughter"/>
               </a:rPr>
               <a:t>keepalive &lt; LB idle</a:t>
             </a:r>
@@ -6624,17 +6370,17 @@
         </p:nvCxnSpPr>
         <p:spPr>
           <a:xfrm>
-            <a:off x="2322576" y="1490472"/>
-            <a:ext cx="347472" cy="484632"/>
+            <a:off x="2221992" y="1695196"/>
+            <a:ext cx="420624" cy="580136"/>
           </a:xfrm>
           <a:prstGeom prst="line">
             <a:avLst/>
           </a:prstGeom>
-          <a:ln w="22225">
+          <a:ln w="31750">
             <a:solidFill>
               <a:srgbClr val="1E1E1E"/>
             </a:solidFill>
-            <a:tailEnd type="triangle" w="med" len="med"/>
+            <a:tailEnd type="triangle" w="lg" len="lg"/>
           </a:ln>
         </p:spPr>
         <p:style>
@@ -6660,17 +6406,17 @@
         </p:nvCxnSpPr>
         <p:spPr>
           <a:xfrm flipV="1">
-            <a:off x="2322576" y="1975104"/>
-            <a:ext cx="347472" cy="484632"/>
+            <a:off x="2221992" y="2275332"/>
+            <a:ext cx="420624" cy="707644"/>
           </a:xfrm>
           <a:prstGeom prst="line">
             <a:avLst/>
           </a:prstGeom>
-          <a:ln w="22225">
+          <a:ln w="31750">
             <a:solidFill>
               <a:srgbClr val="1E1E1E"/>
             </a:solidFill>
-            <a:tailEnd type="triangle" w="med" len="med"/>
+            <a:tailEnd type="triangle" w="lg" len="lg"/>
           </a:ln>
         </p:spPr>
         <p:style>
@@ -6696,17 +6442,17 @@
         </p:nvCxnSpPr>
         <p:spPr>
           <a:xfrm flipV="1">
-            <a:off x="2322576" y="1975104"/>
-            <a:ext cx="347472" cy="1453896"/>
+            <a:off x="2221992" y="2275332"/>
+            <a:ext cx="420624" cy="1995424"/>
           </a:xfrm>
           <a:prstGeom prst="line">
             <a:avLst/>
           </a:prstGeom>
-          <a:ln w="22225">
+          <a:ln w="31750">
             <a:solidFill>
               <a:srgbClr val="1E1E1E"/>
             </a:solidFill>
-            <a:tailEnd type="triangle" w="med" len="med"/>
+            <a:tailEnd type="triangle" w="lg" len="lg"/>
           </a:ln>
         </p:spPr>
         <p:style>
@@ -6732,8 +6478,8 @@
         </p:nvSpPr>
         <p:spPr>
           <a:xfrm>
-            <a:off x="10131552" y="3163824"/>
-            <a:ext cx="1673352" cy="914400"/>
+            <a:off x="10341863" y="3727958"/>
+            <a:ext cx="1435608" cy="778256"/>
           </a:xfrm>
           <a:prstGeom prst="roundRect">
             <a:avLst>
@@ -6743,7 +6489,7 @@
           <a:solidFill>
             <a:srgbClr val="A5D8FF"/>
           </a:solidFill>
-          <a:ln w="28575">
+          <a:ln w="31750">
             <a:solidFill>
               <a:srgbClr val="1971C2"/>
             </a:solidFill>
@@ -6774,7 +6520,7 @@
           </a:fontRef>
         </p:style>
         <p:txBody>
-          <a:bodyPr rtlCol="0" anchor="ctr" wrap="square" tIns="54864" bIns="54864"/>
+          <a:bodyPr rtlCol="0" anchor="ctr" wrap="square" lIns="100584" rIns="100584" tIns="64008" bIns="64008"/>
           <a:lstStyle/>
           <a:p>
             <a:pPr algn="ctr"/>
@@ -6783,50 +6529,91 @@
                 <a:solidFill>
                   <a:srgbClr val="1971C2"/>
                 </a:solidFill>
-                <a:latin typeface="Arial"/>
+                <a:latin typeface="Architects Daughter"/>
               </a:rPr>
               <a:t>REORDER</a:t>
             </a:r>
           </a:p>
           <a:p>
-            <a:pPr>
-              <a:spcBef>
-                <a:spcPts val="200"/>
-              </a:spcBef>
-            </a:pPr>
-            <a:r>
-              <a:rPr sz="750" b="0">
+            <a:pPr algn="ctr">
+              <a:spcBef>
+                <a:spcPts val="200"/>
+              </a:spcBef>
+            </a:pPr>
+            <a:r>
+              <a:rPr sz="800" b="0">
                 <a:solidFill>
                   <a:srgbClr val="5C5650"/>
                 </a:solidFill>
-                <a:latin typeface="Arial"/>
+                <a:latin typeface="Architects Daughter"/>
               </a:rPr>
               <a:t>by window_seq</a:t>
             </a:r>
           </a:p>
           <a:p>
-            <a:r>
-              <a:rPr sz="750" b="0">
+            <a:pPr algn="ctr">
+              <a:spcBef>
+                <a:spcPts val="200"/>
+              </a:spcBef>
+            </a:pPr>
+            <a:r>
+              <a:rPr sz="800" b="0">
                 <a:solidFill>
                   <a:srgbClr val="5C5650"/>
                 </a:solidFill>
-                <a:latin typeface="Arial"/>
+                <a:latin typeface="Architects Daughter"/>
               </a:rPr>
               <a:t>300 ms bounded wait</a:t>
             </a:r>
           </a:p>
         </p:txBody>
       </p:sp>
-      <p:sp>
-        <p:nvSpPr>
-          <p:cNvPr id="20" name="Rounded Rectangle 19"/>
+      <p:cxnSp>
+        <p:nvCxnSpPr>
+          <p:cNvPr id="20" name="Connector 19"/>
+          <p:cNvCxnSpPr/>
+          <p:nvPr/>
+        </p:nvCxnSpPr>
+        <p:spPr>
+          <a:xfrm flipH="1">
+            <a:off x="9912096" y="4117086"/>
+            <a:ext cx="384047" cy="0"/>
+          </a:xfrm>
+          <a:prstGeom prst="line">
+            <a:avLst/>
+          </a:prstGeom>
+          <a:ln w="38100">
+            <a:solidFill>
+              <a:srgbClr val="9C36B5"/>
+            </a:solidFill>
+            <a:tailEnd type="triangle" w="lg" len="lg"/>
+          </a:ln>
+        </p:spPr>
+        <p:style>
+          <a:lnRef idx="2">
+            <a:schemeClr val="accent1"/>
+          </a:lnRef>
+          <a:fillRef idx="0">
+            <a:schemeClr val="accent1"/>
+          </a:fillRef>
+          <a:effectRef idx="1">
+            <a:schemeClr val="accent1"/>
+          </a:effectRef>
+          <a:fontRef idx="minor">
+            <a:schemeClr val="tx1"/>
+          </a:fontRef>
+        </p:style>
+      </p:cxnSp>
+      <p:sp>
+        <p:nvSpPr>
+          <p:cNvPr id="21" name="Rounded Rectangle 20"/>
           <p:cNvSpPr/>
           <p:nvPr/>
         </p:nvSpPr>
         <p:spPr>
           <a:xfrm>
-            <a:off x="8092440" y="3163824"/>
-            <a:ext cx="1673352" cy="914400"/>
+            <a:off x="8430767" y="3727958"/>
+            <a:ext cx="1435608" cy="778256"/>
           </a:xfrm>
           <a:prstGeom prst="roundRect">
             <a:avLst>
@@ -6836,7 +6623,7 @@
           <a:solidFill>
             <a:srgbClr val="A5D8FF"/>
           </a:solidFill>
-          <a:ln w="28575">
+          <a:ln w="31750">
             <a:solidFill>
               <a:srgbClr val="1971C2"/>
             </a:solidFill>
@@ -6867,7 +6654,7 @@
           </a:fontRef>
         </p:style>
         <p:txBody>
-          <a:bodyPr rtlCol="0" anchor="ctr" wrap="square" tIns="54864" bIns="54864"/>
+          <a:bodyPr rtlCol="0" anchor="ctr" wrap="square" lIns="100584" rIns="100584" tIns="64008" bIns="64008"/>
           <a:lstStyle/>
           <a:p>
             <a:pPr algn="ctr"/>
@@ -6876,50 +6663,91 @@
                 <a:solidFill>
                   <a:srgbClr val="1971C2"/>
                 </a:solidFill>
-                <a:latin typeface="Arial"/>
+                <a:latin typeface="Architects Daughter"/>
               </a:rPr>
               <a:t>FAN-OUT</a:t>
             </a:r>
           </a:p>
           <a:p>
-            <a:pPr>
-              <a:spcBef>
-                <a:spcPts val="200"/>
-              </a:spcBef>
-            </a:pPr>
-            <a:r>
-              <a:rPr sz="750" b="0">
+            <a:pPr algn="ctr">
+              <a:spcBef>
+                <a:spcPts val="200"/>
+              </a:spcBef>
+            </a:pPr>
+            <a:r>
+              <a:rPr sz="800" b="0">
                 <a:solidFill>
                   <a:srgbClr val="5C5650"/>
                 </a:solidFill>
-                <a:latin typeface="Arial"/>
+                <a:latin typeface="Architects Daughter"/>
               </a:rPr>
               <a:t>dedupe · annotate gaps</a:t>
             </a:r>
           </a:p>
           <a:p>
-            <a:r>
-              <a:rPr sz="750" b="0">
+            <a:pPr algn="ctr">
+              <a:spcBef>
+                <a:spcPts val="200"/>
+              </a:spcBef>
+            </a:pPr>
+            <a:r>
+              <a:rPr sz="800" b="0">
                 <a:solidFill>
                   <a:srgbClr val="5C5650"/>
                 </a:solidFill>
-                <a:latin typeface="Arial"/>
+                <a:latin typeface="Architects Daughter"/>
               </a:rPr>
               <a:t>risk / dash / CRM</a:t>
             </a:r>
           </a:p>
         </p:txBody>
       </p:sp>
-      <p:sp>
-        <p:nvSpPr>
-          <p:cNvPr id="21" name="Rounded Rectangle 20"/>
+      <p:cxnSp>
+        <p:nvCxnSpPr>
+          <p:cNvPr id="22" name="Connector 21"/>
+          <p:cNvCxnSpPr/>
+          <p:nvPr/>
+        </p:nvCxnSpPr>
+        <p:spPr>
+          <a:xfrm flipH="1">
+            <a:off x="8001000" y="4117086"/>
+            <a:ext cx="384047" cy="0"/>
+          </a:xfrm>
+          <a:prstGeom prst="line">
+            <a:avLst/>
+          </a:prstGeom>
+          <a:ln w="38100">
+            <a:solidFill>
+              <a:srgbClr val="9C36B5"/>
+            </a:solidFill>
+            <a:tailEnd type="triangle" w="lg" len="lg"/>
+          </a:ln>
+        </p:spPr>
+        <p:style>
+          <a:lnRef idx="2">
+            <a:schemeClr val="accent1"/>
+          </a:lnRef>
+          <a:fillRef idx="0">
+            <a:schemeClr val="accent1"/>
+          </a:fillRef>
+          <a:effectRef idx="1">
+            <a:schemeClr val="accent1"/>
+          </a:effectRef>
+          <a:fontRef idx="minor">
+            <a:schemeClr val="tx1"/>
+          </a:fontRef>
+        </p:style>
+      </p:cxnSp>
+      <p:sp>
+        <p:nvSpPr>
+          <p:cNvPr id="23" name="Rounded Rectangle 22"/>
           <p:cNvSpPr/>
           <p:nvPr/>
         </p:nvSpPr>
         <p:spPr>
           <a:xfrm>
-            <a:off x="6053327" y="3163824"/>
-            <a:ext cx="1673352" cy="914400"/>
+            <a:off x="6519671" y="3727958"/>
+            <a:ext cx="1435608" cy="778256"/>
           </a:xfrm>
           <a:prstGeom prst="roundRect">
             <a:avLst>
@@ -6929,7 +6757,7 @@
           <a:solidFill>
             <a:srgbClr val="F5F2EC"/>
           </a:solidFill>
-          <a:ln w="28575">
+          <a:ln w="31750">
             <a:solidFill>
               <a:srgbClr val="1E1E1E"/>
             </a:solidFill>
@@ -6960,7 +6788,7 @@
           </a:fontRef>
         </p:style>
         <p:txBody>
-          <a:bodyPr rtlCol="0" anchor="ctr" wrap="square" tIns="54864" bIns="54864"/>
+          <a:bodyPr rtlCol="0" anchor="ctr" wrap="square" lIns="100584" rIns="100584" tIns="64008" bIns="64008"/>
           <a:lstStyle/>
           <a:p>
             <a:pPr algn="ctr"/>
@@ -6969,34 +6797,39 @@
                 <a:solidFill>
                   <a:srgbClr val="1E1E1E"/>
                 </a:solidFill>
-                <a:latin typeface="Arial"/>
+                <a:latin typeface="Architects Daughter"/>
               </a:rPr>
               <a:t>(4) RISK ENGINE</a:t>
             </a:r>
           </a:p>
           <a:p>
-            <a:pPr>
-              <a:spcBef>
-                <a:spcPts val="200"/>
-              </a:spcBef>
-            </a:pPr>
-            <a:r>
-              <a:rPr sz="750" b="0">
+            <a:pPr algn="ctr">
+              <a:spcBef>
+                <a:spcPts val="200"/>
+              </a:spcBef>
+            </a:pPr>
+            <a:r>
+              <a:rPr sz="800" b="0">
                 <a:solidFill>
                   <a:srgbClr val="5C5650"/>
                 </a:solidFill>
-                <a:latin typeface="Arial"/>
+                <a:latin typeface="Architects Daughter"/>
               </a:rPr>
               <a:t>weighted fusion</a:t>
             </a:r>
           </a:p>
           <a:p>
-            <a:r>
-              <a:rPr sz="750" b="0">
+            <a:pPr algn="ctr">
+              <a:spcBef>
+                <a:spcPts val="200"/>
+              </a:spcBef>
+            </a:pPr>
+            <a:r>
+              <a:rPr sz="800" b="0">
                 <a:solidFill>
                   <a:srgbClr val="5C5650"/>
                 </a:solidFill>
-                <a:latin typeface="Arial"/>
+                <a:latin typeface="Architects Daughter"/>
               </a:rPr>
               <a:t>prevention actions</a:t>
             </a:r>
@@ -7005,23 +6838,23 @@
       </p:sp>
       <p:cxnSp>
         <p:nvCxnSpPr>
-          <p:cNvPr id="22" name="Connector 21"/>
+          <p:cNvPr id="24" name="Connector 23"/>
           <p:cNvCxnSpPr/>
           <p:nvPr/>
         </p:nvCxnSpPr>
         <p:spPr>
-          <a:xfrm>
-            <a:off x="10968228" y="2926080"/>
-            <a:ext cx="0" cy="201168"/>
+          <a:xfrm flipH="1">
+            <a:off x="6089903" y="4117086"/>
+            <a:ext cx="384048" cy="0"/>
           </a:xfrm>
           <a:prstGeom prst="line">
             <a:avLst/>
           </a:prstGeom>
-          <a:ln w="28575">
+          <a:ln w="38100">
             <a:solidFill>
               <a:srgbClr val="9C36B5"/>
             </a:solidFill>
-            <a:tailEnd type="triangle" w="med" len="med"/>
+            <a:tailEnd type="triangle" w="lg" len="lg"/>
           </a:ln>
         </p:spPr>
         <p:style>
@@ -7041,23 +6874,23 @@
       </p:cxnSp>
       <p:cxnSp>
         <p:nvCxnSpPr>
-          <p:cNvPr id="23" name="Connector 22"/>
+          <p:cNvPr id="25" name="Connector 24"/>
           <p:cNvCxnSpPr/>
           <p:nvPr/>
         </p:nvCxnSpPr>
         <p:spPr>
-          <a:xfrm flipH="1">
-            <a:off x="9829800" y="3621024"/>
-            <a:ext cx="265176" cy="0"/>
+          <a:xfrm>
+            <a:off x="11059667" y="3362198"/>
+            <a:ext cx="0" cy="310896"/>
           </a:xfrm>
           <a:prstGeom prst="line">
             <a:avLst/>
           </a:prstGeom>
-          <a:ln w="28575">
+          <a:ln w="38100">
             <a:solidFill>
               <a:srgbClr val="9C36B5"/>
             </a:solidFill>
-            <a:tailEnd type="triangle" w="med" len="med"/>
+            <a:tailEnd type="triangle" w="lg" len="lg"/>
           </a:ln>
         </p:spPr>
         <p:style>
@@ -7075,52 +6908,16 @@
           </a:fontRef>
         </p:style>
       </p:cxnSp>
-      <p:cxnSp>
-        <p:nvCxnSpPr>
-          <p:cNvPr id="24" name="Connector 23"/>
-          <p:cNvCxnSpPr/>
-          <p:nvPr/>
-        </p:nvCxnSpPr>
-        <p:spPr>
-          <a:xfrm flipH="1">
-            <a:off x="7790688" y="3621024"/>
-            <a:ext cx="265176" cy="0"/>
-          </a:xfrm>
-          <a:prstGeom prst="line">
-            <a:avLst/>
-          </a:prstGeom>
-          <a:ln w="28575">
-            <a:solidFill>
-              <a:srgbClr val="9C36B5"/>
-            </a:solidFill>
-            <a:tailEnd type="triangle" w="med" len="med"/>
-          </a:ln>
-        </p:spPr>
-        <p:style>
-          <a:lnRef idx="2">
-            <a:schemeClr val="accent1"/>
-          </a:lnRef>
-          <a:fillRef idx="0">
-            <a:schemeClr val="accent1"/>
-          </a:fillRef>
-          <a:effectRef idx="1">
-            <a:schemeClr val="accent1"/>
-          </a:effectRef>
-          <a:fontRef idx="minor">
-            <a:schemeClr val="tx1"/>
-          </a:fontRef>
-        </p:style>
-      </p:cxnSp>
-      <p:sp>
-        <p:nvSpPr>
-          <p:cNvPr id="25" name="TextBox 24"/>
+      <p:sp>
+        <p:nvSpPr>
+          <p:cNvPr id="26" name="TextBox 25"/>
           <p:cNvSpPr txBox="1"/>
           <p:nvPr/>
         </p:nvSpPr>
         <p:spPr>
           <a:xfrm>
-            <a:off x="11027664" y="2926080"/>
-            <a:ext cx="777240" cy="164592"/>
+            <a:off x="10236708" y="3435350"/>
+            <a:ext cx="512064" cy="182880"/>
           </a:xfrm>
           <a:prstGeom prst="rect">
             <a:avLst/>
@@ -7128,18 +6925,18 @@
           <a:noFill/>
         </p:spPr>
         <p:txBody>
-          <a:bodyPr wrap="square" lIns="0" rIns="0" tIns="0" bIns="0" anchor="t">
+          <a:bodyPr wrap="square" lIns="0" rIns="0" tIns="0" bIns="0">
             <a:spAutoFit/>
           </a:bodyPr>
           <a:lstStyle/>
           <a:p>
             <a:pPr algn="ctr"/>
             <a:r>
-              <a:rPr sz="850" b="0">
+              <a:rPr sz="800" b="1">
                 <a:solidFill>
                   <a:srgbClr val="9C36B5"/>
                 </a:solidFill>
-                <a:latin typeface="Arial"/>
+                <a:latin typeface="Architects Daughter"/>
               </a:rPr>
               <a:t>scores</a:t>
             </a:r>
@@ -7148,14 +6945,14 @@
       </p:sp>
       <p:sp>
         <p:nvSpPr>
-          <p:cNvPr id="26" name="TextBox 25"/>
+          <p:cNvPr id="27" name="TextBox 26"/>
           <p:cNvSpPr txBox="1"/>
           <p:nvPr/>
         </p:nvSpPr>
         <p:spPr>
           <a:xfrm>
-            <a:off x="384048" y="4279392"/>
-            <a:ext cx="11430000" cy="219456"/>
+            <a:off x="384048" y="4817110"/>
+            <a:ext cx="11430000" cy="310896"/>
           </a:xfrm>
           <a:prstGeom prst="rect">
             <a:avLst/>
@@ -7163,7 +6960,7 @@
           <a:noFill/>
         </p:spPr>
         <p:txBody>
-          <a:bodyPr wrap="square" lIns="0" rIns="0" tIns="0" bIns="0" anchor="t">
+          <a:bodyPr wrap="square" lIns="0" rIns="0" tIns="0" bIns="0">
             <a:spAutoFit/>
           </a:bodyPr>
           <a:lstStyle/>
@@ -7173,7 +6970,7 @@
                 <a:solidFill>
                   <a:srgbClr val="1971C2"/>
                 </a:solidFill>
-                <a:latin typeface="Arial"/>
+                <a:latin typeface="Architects Daughter"/>
               </a:rPr>
               <a:t>THREE DECISIONS THAT DETERMINE WHETHER THIS SCALES</a:t>
             </a:r>
@@ -7182,14 +6979,14 @@
       </p:sp>
       <p:sp>
         <p:nvSpPr>
-          <p:cNvPr id="27" name="Rounded Rectangle 26"/>
+          <p:cNvPr id="28" name="Rounded Rectangle 27"/>
           <p:cNvSpPr/>
           <p:nvPr/>
         </p:nvSpPr>
         <p:spPr>
           <a:xfrm>
-            <a:off x="384048" y="4517136"/>
-            <a:ext cx="3712463" cy="1792224"/>
+            <a:off x="384048" y="5073142"/>
+            <a:ext cx="3712463" cy="1158748"/>
           </a:xfrm>
           <a:prstGeom prst="roundRect">
             <a:avLst>
@@ -7230,7 +7027,7 @@
           </a:fontRef>
         </p:style>
         <p:txBody>
-          <a:bodyPr rtlCol="0" anchor="t" wrap="square" tIns="54864" bIns="54864"/>
+          <a:bodyPr rtlCol="0" anchor="t" wrap="square" lIns="100584" rIns="100584" tIns="64008" bIns="64008"/>
           <a:lstStyle/>
           <a:p>
             <a:pPr algn="ctr"/>
@@ -7239,51 +7036,55 @@
                 <a:solidFill>
                   <a:srgbClr val="1971C2"/>
                 </a:solidFill>
-                <a:latin typeface="Arial"/>
+                <a:latin typeface="Architects Daughter"/>
               </a:rPr>
               <a:t>CONCURRENCY</a:t>
             </a:r>
           </a:p>
           <a:p>
+            <a:pPr>
+              <a:spcBef>
+                <a:spcPts val="200"/>
+              </a:spcBef>
+            </a:pPr>
             <a:r>
               <a:rPr sz="1000" b="1">
                 <a:solidFill>
                   <a:srgbClr val="1E1E1E"/>
                 </a:solidFill>
-                <a:latin typeface="Arial"/>
+                <a:latin typeface="Architects Daughter"/>
               </a:rPr>
               <a:t>One asyncio loop. No per-session threads.</a:t>
             </a:r>
           </a:p>
           <a:p>
+            <a:pPr>
+              <a:spcBef>
+                <a:spcPts val="200"/>
+              </a:spcBef>
+            </a:pPr>
             <a:r>
               <a:rPr sz="800" b="0">
                 <a:solidFill>
                   <a:srgbClr val="1E1E1E"/>
                 </a:solidFill>
-                <a:latin typeface="Arial"/>
+                <a:latin typeface="Architects Daughter"/>
               </a:rPr>
               <a:t>1,200 threads costs ~9.6 GB of stack before any audio is buffered, and collapses on context switching. Sessions are coroutines; each ring has exactly one producer and one consumer, so it needs no lock.</a:t>
             </a:r>
           </a:p>
           <a:p>
-            <a:r>
-              <a:rPr sz="800" b="0">
-                <a:solidFill>
-                  <a:srgbClr val="5C5650"/>
-                </a:solidFill>
-                <a:latin typeface="Arial"/>
-              </a:rPr>
-              <a:t>CPU work (resample, VAD) runs in a process pool — a 5 ms block on the loop x 1,200 sessions is 300 s of stall per second.</a:t>
-            </a:r>
-          </a:p>
-          <a:p>
+            <a:pPr>
+              <a:spcBef>
+                <a:spcPts val="200"/>
+              </a:spcBef>
+            </a:pPr>
             <a:r>
               <a:rPr sz="800" b="1">
                 <a:solidFill>
                   <a:srgbClr val="1971C2"/>
                 </a:solidFill>
-                <a:latin typeface="Arial"/>
+                <a:latin typeface="Architects Daughter"/>
               </a:rPr>
               <a:t>Verified by: 1,200 concurrent sessions held for 30 min inside the latency budget.</a:t>
             </a:r>
@@ -7292,14 +7093,14 @@
       </p:sp>
       <p:sp>
         <p:nvSpPr>
-          <p:cNvPr id="28" name="Rounded Rectangle 27"/>
+          <p:cNvPr id="29" name="Rounded Rectangle 28"/>
           <p:cNvSpPr/>
           <p:nvPr/>
         </p:nvSpPr>
         <p:spPr>
           <a:xfrm>
-            <a:off x="4242816" y="4517136"/>
-            <a:ext cx="3712463" cy="1792224"/>
+            <a:off x="4242816" y="5073142"/>
+            <a:ext cx="3712463" cy="1158748"/>
           </a:xfrm>
           <a:prstGeom prst="roundRect">
             <a:avLst>
@@ -7340,7 +7141,7 @@
           </a:fontRef>
         </p:style>
         <p:txBody>
-          <a:bodyPr rtlCol="0" anchor="t" wrap="square" tIns="54864" bIns="54864"/>
+          <a:bodyPr rtlCol="0" anchor="t" wrap="square" lIns="100584" rIns="100584" tIns="64008" bIns="64008"/>
           <a:lstStyle/>
           <a:p>
             <a:pPr algn="ctr"/>
@@ -7349,51 +7150,55 @@
                 <a:solidFill>
                   <a:srgbClr val="9C36B5"/>
                 </a:solidFill>
-                <a:latin typeface="Arial"/>
+                <a:latin typeface="Architects Daughter"/>
               </a:rPr>
               <a:t>THE CLOCK</a:t>
             </a:r>
           </a:p>
           <a:p>
+            <a:pPr>
+              <a:spcBef>
+                <a:spcPts val="200"/>
+              </a:spcBef>
+            </a:pPr>
             <a:r>
               <a:rPr sz="1000" b="1">
                 <a:solidFill>
                   <a:srgbClr val="1E1E1E"/>
                 </a:solidFill>
-                <a:latin typeface="Arial"/>
+                <a:latin typeface="Architects Daughter"/>
               </a:rPr>
               <a:t>sample_offset is authoritative — not wall time.</a:t>
             </a:r>
           </a:p>
           <a:p>
+            <a:pPr>
+              <a:spcBef>
+                <a:spcPts val="200"/>
+              </a:spcBef>
+            </a:pPr>
             <a:r>
               <a:rPr sz="800" b="0">
                 <a:solidFill>
                   <a:srgbClr val="1E1E1E"/>
                 </a:solidFill>
-                <a:latin typeface="Arial"/>
-              </a:rPr>
-              <a:t>Wall clocks drift, jump on NTP, and differ per pod. A gateway running at 8000.5 Hz against an assumed 8000 Hz accumulates 1.8 s of error per hour.</a:t>
-            </a:r>
-          </a:p>
-          <a:p>
-            <a:r>
-              <a:rPr sz="800" b="0">
-                <a:solidFill>
-                  <a:srgbClr val="5C5650"/>
-                </a:solidFill>
-                <a:latin typeface="Arial"/>
-              </a:rPr>
-              <a:t>Windowing must be reproducible: the same audio must produce the same windows regardless of when packets happened to arrive. Wall clock is used only to measure the SLA.</a:t>
-            </a:r>
-          </a:p>
-          <a:p>
+                <a:latin typeface="Architects Daughter"/>
+              </a:rPr>
+              <a:t>Wall clocks drift, jump on NTP and differ per pod. A gateway running at 8000.5 Hz against an assumed 8000 Hz accumulates 1.8 s of error per hour. Windowing must be reproducible.</a:t>
+            </a:r>
+          </a:p>
+          <a:p>
+            <a:pPr>
+              <a:spcBef>
+                <a:spcPts val="200"/>
+              </a:spcBef>
+            </a:pPr>
             <a:r>
               <a:rPr sz="800" b="1">
                 <a:solidFill>
                   <a:srgbClr val="9C36B5"/>
                 </a:solidFill>
-                <a:latin typeface="Arial"/>
+                <a:latin typeface="Architects Daughter"/>
               </a:rPr>
               <a:t>Verified by: sample_offset stays monotonic across an injected 300 ms gap and a reconnect.</a:t>
             </a:r>
@@ -7402,14 +7207,14 @@
       </p:sp>
       <p:sp>
         <p:nvSpPr>
-          <p:cNvPr id="29" name="Rounded Rectangle 28"/>
+          <p:cNvPr id="30" name="Rounded Rectangle 29"/>
           <p:cNvSpPr/>
           <p:nvPr/>
         </p:nvSpPr>
         <p:spPr>
           <a:xfrm>
-            <a:off x="8101583" y="4517136"/>
-            <a:ext cx="3712463" cy="1792224"/>
+            <a:off x="8101583" y="5073142"/>
+            <a:ext cx="3712463" cy="1158748"/>
           </a:xfrm>
           <a:prstGeom prst="roundRect">
             <a:avLst>
@@ -7450,7 +7255,7 @@
           </a:fontRef>
         </p:style>
         <p:txBody>
-          <a:bodyPr rtlCol="0" anchor="t" wrap="square" tIns="54864" bIns="54864"/>
+          <a:bodyPr rtlCol="0" anchor="t" wrap="square" lIns="100584" rIns="100584" tIns="64008" bIns="64008"/>
           <a:lstStyle/>
           <a:p>
             <a:pPr algn="ctr"/>
@@ -7459,51 +7264,55 @@
                 <a:solidFill>
                   <a:srgbClr val="2F9E44"/>
                 </a:solidFill>
-                <a:latin typeface="Arial"/>
+                <a:latin typeface="Architects Daughter"/>
               </a:rPr>
               <a:t>MEMORY</a:t>
             </a:r>
           </a:p>
           <a:p>
+            <a:pPr>
+              <a:spcBef>
+                <a:spcPts val="200"/>
+              </a:spcBef>
+            </a:pPr>
             <a:r>
               <a:rPr sz="1000" b="1">
                 <a:solidFill>
                   <a:srgbClr val="1E1E1E"/>
                 </a:solidFill>
-                <a:latin typeface="Arial"/>
+                <a:latin typeface="Architects Daughter"/>
               </a:rPr>
               <a:t>256 KB per session, enforced.</a:t>
             </a:r>
           </a:p>
           <a:p>
+            <a:pPr>
+              <a:spcBef>
+                <a:spcPts val="200"/>
+              </a:spcBef>
+            </a:pPr>
             <a:r>
               <a:rPr sz="800" b="0">
                 <a:solidFill>
                   <a:srgbClr val="1E1E1E"/>
                 </a:solidFill>
-                <a:latin typeface="Arial"/>
-              </a:rPr>
-              <a:t>4 s ring x 16 kHz x 4 bytes = 256 KB. At 1,200 concurrent sessions that is ~300 MB — comfortable.</a:t>
-            </a:r>
-          </a:p>
-          <a:p>
-            <a:r>
-              <a:rPr sz="800" b="0">
-                <a:solidFill>
-                  <a:srgbClr val="5C5650"/>
-                </a:solidFill>
-                <a:latin typeface="Arial"/>
-              </a:rPr>
-              <a:t>The same design with an unbounded per-session accumulator over a 1-hour call would be 690 GB.</a:t>
-            </a:r>
-          </a:p>
-          <a:p>
+                <a:latin typeface="Architects Daughter"/>
+              </a:rPr>
+              <a:t>4 s ring x 16 kHz x 4 bytes = 256 KB. At 1,200 sessions that is ~300 MB. The same design with an unbounded per-session accumulator over a 1-hour call would be 690 GB.</a:t>
+            </a:r>
+          </a:p>
+          <a:p>
+            <a:pPr>
+              <a:spcBef>
+                <a:spcPts val="200"/>
+              </a:spcBef>
+            </a:pPr>
             <a:r>
               <a:rPr sz="800" b="1">
                 <a:solidFill>
                   <a:srgbClr val="2F9E44"/>
                 </a:solidFill>
-                <a:latin typeface="Arial"/>
+                <a:latin typeface="Architects Daughter"/>
               </a:rPr>
               <a:t>Verified by: 8-hour soak at 200 sessions — any upward memory slope is a per-session leak.</a:t>
             </a:r>
@@ -7536,8 +7345,8 @@
         </p:nvSpPr>
         <p:spPr>
           <a:xfrm>
-            <a:off x="384048" y="146304"/>
-            <a:ext cx="11430000" cy="402336"/>
+            <a:off x="384048" y="128016"/>
+            <a:ext cx="11430000" cy="531368"/>
           </a:xfrm>
           <a:prstGeom prst="rect">
             <a:avLst/>
@@ -7545,26 +7354,26 @@
           <a:noFill/>
         </p:spPr>
         <p:txBody>
-          <a:bodyPr wrap="square" lIns="0" rIns="0" tIns="0" bIns="0" anchor="t">
+          <a:bodyPr wrap="square" lIns="0" rIns="0" tIns="0" bIns="0">
             <a:spAutoFit/>
           </a:bodyPr>
           <a:lstStyle/>
           <a:p>
             <a:r>
-              <a:rPr sz="2500" b="1">
+              <a:rPr sz="2400" b="1">
                 <a:solidFill>
                   <a:srgbClr val="1E1E1E"/>
                 </a:solidFill>
-                <a:latin typeface="Arial"/>
+                <a:latin typeface="Architects Daughter"/>
               </a:rPr>
               <a:t>Latency, Failure Handling</a:t>
             </a:r>
             <a:r>
-              <a:rPr sz="2500" b="0">
+              <a:rPr sz="2400" b="0">
                 <a:solidFill>
                   <a:srgbClr val="1971C2"/>
                 </a:solidFill>
-                <a:latin typeface="Arial"/>
+                <a:latin typeface="Architects Daughter"/>
               </a:rPr>
               <a:t>  &amp;  the Edge Cases That Fail Silently</a:t>
             </a:r>
@@ -7579,8 +7388,8 @@
         </p:nvSpPr>
         <p:spPr>
           <a:xfrm>
-            <a:off x="384048" y="566928"/>
-            <a:ext cx="11430000" cy="237744"/>
+            <a:off x="384048" y="695960"/>
+            <a:ext cx="11430000" cy="318770"/>
           </a:xfrm>
           <a:prstGeom prst="rect">
             <a:avLst/>
@@ -7588,17 +7397,17 @@
           <a:noFill/>
         </p:spPr>
         <p:txBody>
-          <a:bodyPr wrap="square" lIns="0" rIns="0" tIns="0" bIns="0" anchor="t">
+          <a:bodyPr wrap="square" lIns="0" rIns="0" tIns="0" bIns="0">
             <a:spAutoFit/>
           </a:bodyPr>
           <a:lstStyle/>
           <a:p>
             <a:r>
-              <a:rPr sz="1100">
+              <a:rPr sz="1050" b="0">
                 <a:solidFill>
                   <a:srgbClr val="5C5650"/>
                 </a:solidFill>
-                <a:latin typeface="Arial"/>
+                <a:latin typeface="Architects Daughter"/>
               </a:rPr>
               <a:t>Most failures are loud, and therefore cheap. The expensive ones produce plausible-looking numbers that are wrong.</a:t>
             </a:r>
@@ -7613,8 +7422,8 @@
         </p:nvSpPr>
         <p:spPr>
           <a:xfrm>
-            <a:off x="384048" y="896112"/>
-            <a:ext cx="5669280" cy="201168"/>
+            <a:off x="384048" y="1142746"/>
+            <a:ext cx="5632704" cy="303022"/>
           </a:xfrm>
           <a:prstGeom prst="rect">
             <a:avLst/>
@@ -7622,7 +7431,7 @@
           <a:noFill/>
         </p:spPr>
         <p:txBody>
-          <a:bodyPr wrap="square" lIns="0" rIns="0" tIns="0" bIns="0" anchor="t">
+          <a:bodyPr wrap="square" lIns="0" rIns="0" tIns="0" bIns="0">
             <a:spAutoFit/>
           </a:bodyPr>
           <a:lstStyle/>
@@ -7632,7 +7441,7 @@
                 <a:solidFill>
                   <a:srgbClr val="1E1E1E"/>
                 </a:solidFill>
-                <a:latin typeface="Arial"/>
+                <a:latin typeface="Architects Daughter"/>
               </a:rPr>
               <a:t>500 ms END-TO-END SLA</a:t>
             </a:r>
@@ -7641,7 +7450,7 @@
                 <a:solidFill>
                   <a:srgbClr val="5C5650"/>
                 </a:solidFill>
-                <a:latin typeface="Arial"/>
+                <a:latin typeface="Architects Daughter"/>
               </a:rPr>
               <a:t>   caller speaks -&gt; score delivered</a:t>
             </a:r>
@@ -7656,8 +7465,8 @@
         </p:nvSpPr>
         <p:spPr>
           <a:xfrm>
-            <a:off x="384048" y="1133856"/>
-            <a:ext cx="337962" cy="566928"/>
+            <a:off x="384048" y="1398778"/>
+            <a:ext cx="337962" cy="603504"/>
           </a:xfrm>
           <a:prstGeom prst="roundRect">
             <a:avLst>
@@ -7698,7 +7507,7 @@
           </a:fontRef>
         </p:style>
         <p:txBody>
-          <a:bodyPr rtlCol="0" anchor="ctr" wrap="square" tIns="54864" bIns="54864"/>
+          <a:bodyPr rtlCol="0" anchor="ctr" wrap="square" lIns="100584" rIns="100584" tIns="64008" bIns="64008"/>
           <a:lstStyle/>
           <a:p>
             <a:pPr algn="ctr"/>
@@ -7713,8 +7522,8 @@
         </p:nvSpPr>
         <p:spPr>
           <a:xfrm>
-            <a:off x="722010" y="1133856"/>
-            <a:ext cx="56327" cy="566928"/>
+            <a:off x="722010" y="1398778"/>
+            <a:ext cx="56327" cy="603504"/>
           </a:xfrm>
           <a:prstGeom prst="roundRect">
             <a:avLst>
@@ -7755,7 +7564,7 @@
           </a:fontRef>
         </p:style>
         <p:txBody>
-          <a:bodyPr rtlCol="0" anchor="ctr" wrap="square" tIns="54864" bIns="54864"/>
+          <a:bodyPr rtlCol="0" anchor="ctr" wrap="square" lIns="100584" rIns="100584" tIns="64008" bIns="64008"/>
           <a:lstStyle/>
           <a:p>
             <a:pPr algn="ctr"/>
@@ -7770,8 +7579,8 @@
         </p:nvSpPr>
         <p:spPr>
           <a:xfrm>
-            <a:off x="778337" y="1133856"/>
-            <a:ext cx="675924" cy="566928"/>
+            <a:off x="778337" y="1398778"/>
+            <a:ext cx="675924" cy="603504"/>
           </a:xfrm>
           <a:prstGeom prst="roundRect">
             <a:avLst>
@@ -7812,16 +7621,16 @@
           </a:fontRef>
         </p:style>
         <p:txBody>
-          <a:bodyPr rtlCol="0" anchor="ctr" wrap="square" tIns="54864" bIns="54864"/>
+          <a:bodyPr rtlCol="0" anchor="ctr" wrap="square" lIns="100584" rIns="100584" tIns="64008" bIns="64008"/>
           <a:lstStyle/>
           <a:p>
             <a:pPr algn="ctr"/>
             <a:r>
-              <a:rPr sz="900" b="1">
+              <a:rPr sz="1000" b="1">
                 <a:solidFill>
                   <a:srgbClr val="1E1E1E"/>
                 </a:solidFill>
-                <a:latin typeface="Arial"/>
+                <a:latin typeface="Architects Daughter"/>
               </a:rPr>
               <a:t>60</a:t>
             </a:r>
@@ -7836,8 +7645,8 @@
         </p:nvSpPr>
         <p:spPr>
           <a:xfrm>
-            <a:off x="1454261" y="1133856"/>
-            <a:ext cx="1126540" cy="566928"/>
+            <a:off x="1454261" y="1398778"/>
+            <a:ext cx="1126540" cy="603504"/>
           </a:xfrm>
           <a:prstGeom prst="roundRect">
             <a:avLst>
@@ -7878,16 +7687,16 @@
           </a:fontRef>
         </p:style>
         <p:txBody>
-          <a:bodyPr rtlCol="0" anchor="ctr" wrap="square" tIns="54864" bIns="54864"/>
+          <a:bodyPr rtlCol="0" anchor="ctr" wrap="square" lIns="100584" rIns="100584" tIns="64008" bIns="64008"/>
           <a:lstStyle/>
           <a:p>
             <a:pPr algn="ctr"/>
             <a:r>
-              <a:rPr sz="900" b="1">
+              <a:rPr sz="1000" b="1">
                 <a:solidFill>
                   <a:srgbClr val="1E1E1E"/>
                 </a:solidFill>
-                <a:latin typeface="Arial"/>
+                <a:latin typeface="Architects Daughter"/>
               </a:rPr>
               <a:t>100</a:t>
             </a:r>
@@ -7902,8 +7711,8 @@
         </p:nvSpPr>
         <p:spPr>
           <a:xfrm>
-            <a:off x="2580802" y="1133856"/>
-            <a:ext cx="112654" cy="566928"/>
+            <a:off x="2580802" y="1398778"/>
+            <a:ext cx="112654" cy="603504"/>
           </a:xfrm>
           <a:prstGeom prst="roundRect">
             <a:avLst>
@@ -7944,7 +7753,7 @@
           </a:fontRef>
         </p:style>
         <p:txBody>
-          <a:bodyPr rtlCol="0" anchor="ctr" wrap="square" tIns="54864" bIns="54864"/>
+          <a:bodyPr rtlCol="0" anchor="ctr" wrap="square" lIns="100584" rIns="100584" tIns="64008" bIns="64008"/>
           <a:lstStyle/>
           <a:p>
             <a:pPr algn="ctr"/>
@@ -7959,8 +7768,8 @@
         </p:nvSpPr>
         <p:spPr>
           <a:xfrm>
-            <a:off x="2693456" y="1133856"/>
-            <a:ext cx="2253081" cy="566928"/>
+            <a:off x="2693456" y="1398778"/>
+            <a:ext cx="2253081" cy="603504"/>
           </a:xfrm>
           <a:prstGeom prst="roundRect">
             <a:avLst>
@@ -8001,16 +7810,16 @@
           </a:fontRef>
         </p:style>
         <p:txBody>
-          <a:bodyPr rtlCol="0" anchor="ctr" wrap="square" tIns="54864" bIns="54864"/>
+          <a:bodyPr rtlCol="0" anchor="ctr" wrap="square" lIns="100584" rIns="100584" tIns="64008" bIns="64008"/>
           <a:lstStyle/>
           <a:p>
             <a:pPr algn="ctr"/>
             <a:r>
-              <a:rPr sz="900" b="1">
+              <a:rPr sz="1000" b="1">
                 <a:solidFill>
                   <a:srgbClr val="1E1E1E"/>
                 </a:solidFill>
-                <a:latin typeface="Arial"/>
+                <a:latin typeface="Architects Daughter"/>
               </a:rPr>
               <a:t>200</a:t>
             </a:r>
@@ -8025,8 +7834,8 @@
         </p:nvSpPr>
         <p:spPr>
           <a:xfrm>
-            <a:off x="4946538" y="1133856"/>
-            <a:ext cx="225308" cy="566928"/>
+            <a:off x="4946538" y="1398778"/>
+            <a:ext cx="225308" cy="603504"/>
           </a:xfrm>
           <a:prstGeom prst="roundRect">
             <a:avLst>
@@ -8067,7 +7876,7 @@
           </a:fontRef>
         </p:style>
         <p:txBody>
-          <a:bodyPr rtlCol="0" anchor="ctr" wrap="square" tIns="54864" bIns="54864"/>
+          <a:bodyPr rtlCol="0" anchor="ctr" wrap="square" lIns="100584" rIns="100584" tIns="64008" bIns="64008"/>
           <a:lstStyle/>
           <a:p>
             <a:pPr algn="ctr"/>
@@ -8082,8 +7891,8 @@
         </p:nvSpPr>
         <p:spPr>
           <a:xfrm>
-            <a:off x="5171846" y="1133856"/>
-            <a:ext cx="112654" cy="566928"/>
+            <a:off x="5171846" y="1398778"/>
+            <a:ext cx="112654" cy="603504"/>
           </a:xfrm>
           <a:prstGeom prst="roundRect">
             <a:avLst>
@@ -8124,7 +7933,7 @@
           </a:fontRef>
         </p:style>
         <p:txBody>
-          <a:bodyPr rtlCol="0" anchor="ctr" wrap="square" tIns="54864" bIns="54864"/>
+          <a:bodyPr rtlCol="0" anchor="ctr" wrap="square" lIns="100584" rIns="100584" tIns="64008" bIns="64008"/>
           <a:lstStyle/>
           <a:p>
             <a:pPr algn="ctr"/>
@@ -8139,8 +7948,8 @@
         </p:nvSpPr>
         <p:spPr>
           <a:xfrm>
-            <a:off x="5284500" y="1133856"/>
-            <a:ext cx="732251" cy="566928"/>
+            <a:off x="5284500" y="1398778"/>
+            <a:ext cx="732251" cy="603504"/>
           </a:xfrm>
           <a:prstGeom prst="roundRect">
             <a:avLst>
@@ -8181,16 +7990,16 @@
           </a:fontRef>
         </p:style>
         <p:txBody>
-          <a:bodyPr rtlCol="0" anchor="ctr" wrap="square" tIns="54864" bIns="54864"/>
+          <a:bodyPr rtlCol="0" anchor="ctr" wrap="square" lIns="100584" rIns="100584" tIns="64008" bIns="64008"/>
           <a:lstStyle/>
           <a:p>
             <a:pPr algn="ctr"/>
             <a:r>
-              <a:rPr sz="900" b="1">
+              <a:rPr sz="1000" b="1">
                 <a:solidFill>
                   <a:srgbClr val="1E1E1E"/>
                 </a:solidFill>
-                <a:latin typeface="Arial"/>
+                <a:latin typeface="Architects Daughter"/>
               </a:rPr>
               <a:t>65</a:t>
             </a:r>
@@ -8205,8 +8014,8 @@
         </p:nvSpPr>
         <p:spPr>
           <a:xfrm>
-            <a:off x="384048" y="1792224"/>
-            <a:ext cx="5632704" cy="786384"/>
+            <a:off x="384048" y="2112010"/>
+            <a:ext cx="5632704" cy="1032763"/>
           </a:xfrm>
           <a:prstGeom prst="rect">
             <a:avLst/>
@@ -8214,104 +8023,119 @@
           <a:noFill/>
         </p:spPr>
         <p:txBody>
-          <a:bodyPr wrap="square" lIns="0" rIns="0" tIns="0" bIns="0" anchor="t">
+          <a:bodyPr wrap="square" lIns="0" rIns="0" tIns="0" bIns="0">
             <a:spAutoFit/>
           </a:bodyPr>
           <a:lstStyle/>
           <a:p>
             <a:r>
-              <a:rPr sz="800" b="1">
+              <a:rPr sz="850" b="1">
                 <a:solidFill>
                   <a:srgbClr val="2F9E44"/>
                 </a:solidFill>
-                <a:latin typeface="Arial"/>
-              </a:rPr>
-              <a:t>jitter buffer 60 ms</a:t>
-            </a:r>
-            <a:r>
-              <a:rPr sz="800" b="0">
+                <a:latin typeface="Architects Daughter"/>
+              </a:rPr>
+              <a:t>jitter 60 ms</a:t>
+            </a:r>
+            <a:r>
+              <a:rPr sz="850" b="0">
                 <a:solidFill>
                   <a:srgbClr val="5C5650"/>
                 </a:solidFill>
-                <a:latin typeface="Arial"/>
+                <a:latin typeface="Architects Daughter"/>
               </a:rPr>
               <a:t>  ·  </a:t>
             </a:r>
             <a:r>
-              <a:rPr sz="800" b="1">
+              <a:rPr sz="850" b="1">
                 <a:solidFill>
                   <a:srgbClr val="1971C2"/>
                 </a:solidFill>
-                <a:latin typeface="Arial"/>
+                <a:latin typeface="Architects Daughter"/>
               </a:rPr>
               <a:t>window fill 100 ms</a:t>
             </a:r>
             <a:r>
-              <a:rPr sz="800" b="0">
+              <a:rPr sz="850" b="0">
                 <a:solidFill>
                   <a:srgbClr val="5C5650"/>
                 </a:solidFill>
-                <a:latin typeface="Arial"/>
+                <a:latin typeface="Architects Daughter"/>
               </a:rPr>
               <a:t>  ·  </a:t>
             </a:r>
             <a:r>
-              <a:rPr sz="800" b="1">
+              <a:rPr sz="850" b="1">
                 <a:solidFill>
                   <a:srgbClr val="9C36B5"/>
                 </a:solidFill>
-                <a:latin typeface="Arial"/>
+                <a:latin typeface="Architects Daughter"/>
               </a:rPr>
               <a:t>inference 200 ms</a:t>
             </a:r>
             <a:r>
-              <a:rPr sz="800" b="0">
+              <a:rPr sz="850" b="0">
                 <a:solidFill>
                   <a:srgbClr val="5C5650"/>
                 </a:solidFill>
-                <a:latin typeface="Arial"/>
+                <a:latin typeface="Architects Daughter"/>
               </a:rPr>
               <a:t>  ·  </a:t>
             </a:r>
             <a:r>
-              <a:rPr sz="800" b="1">
+              <a:rPr sz="850" b="1">
                 <a:solidFill>
                   <a:srgbClr val="F08C00"/>
                 </a:solidFill>
-                <a:latin typeface="Arial"/>
+                <a:latin typeface="Architects Daughter"/>
               </a:rPr>
               <a:t>slack 65 ms</a:t>
             </a:r>
           </a:p>
           <a:p>
+            <a:pPr>
+              <a:spcBef>
+                <a:spcPts val="200"/>
+              </a:spcBef>
+            </a:pPr>
             <a:r>
               <a:rPr sz="850" b="0">
                 <a:solidFill>
                   <a:srgbClr val="1E1E1E"/>
                 </a:solidFill>
-                <a:latin typeface="Arial"/>
+                <a:latin typeface="Architects Daughter"/>
               </a:rPr>
               <a:t>Inference is 46% of the entire budget — so jitter-buffer depth is my single biggest lever before I must start dropping windows.</a:t>
             </a:r>
           </a:p>
           <a:p>
+            <a:pPr>
+              <a:spcBef>
+                <a:spcPts val="200"/>
+              </a:spcBef>
+            </a:pPr>
             <a:r>
               <a:rPr sz="850" b="0">
                 <a:solidFill>
                   <a:srgbClr val="5C5650"/>
                 </a:solidFill>
-                <a:latin typeface="Arial"/>
+                <a:latin typeface="Architects Daughter"/>
               </a:rPr>
               <a:t>Every stage is measured separately. One end-to-end number cannot tell you which of the four of us regressed, and each of us will assume it was one of the other three.</a:t>
             </a:r>
           </a:p>
           <a:p>
+            <a:pPr>
+              <a:spcBef>
+                <a:spcPts val="200"/>
+              </a:spcBef>
+            </a:pPr>
             <a:r>
               <a:rPr sz="850" b="1">
                 <a:solidFill>
                   <a:srgbClr val="E03131"/>
                 </a:solidFill>
-                <a:latin typeface="Arial"/>
+                <a:latin typeface="Architects Daughter"/>
               </a:rPr>
               <a:t>Time-to-first-score is ~2.4 s, not 500 ms — a full 2 s window must exist before anything can be scored.</a:t>
             </a:r>
@@ -8326,8 +8150,8 @@
         </p:nvSpPr>
         <p:spPr>
           <a:xfrm>
-            <a:off x="384048" y="2670048"/>
-            <a:ext cx="5632704" cy="1005840"/>
+            <a:off x="384048" y="3309366"/>
+            <a:ext cx="5632704" cy="1083563"/>
           </a:xfrm>
           <a:prstGeom prst="roundRect">
             <a:avLst>
@@ -8368,7 +8192,7 @@
           </a:fontRef>
         </p:style>
         <p:txBody>
-          <a:bodyPr rtlCol="0" anchor="t" wrap="square" tIns="54864" bIns="54864"/>
+          <a:bodyPr rtlCol="0" anchor="t" wrap="square" lIns="100584" rIns="100584" tIns="64008" bIns="64008"/>
           <a:lstStyle/>
           <a:p>
             <a:pPr algn="ctr"/>
@@ -8377,7 +8201,7 @@
                 <a:solidFill>
                   <a:srgbClr val="2F9E44"/>
                 </a:solidFill>
-                <a:latin typeface="Arial"/>
+                <a:latin typeface="Architects Daughter"/>
               </a:rPr>
               <a:t>OPERATING-POINT TARGETS</a:t>
             </a:r>
@@ -8386,18 +8210,23 @@
                 <a:solidFill>
                   <a:srgbClr val="5C5650"/>
                 </a:solidFill>
-                <a:latin typeface="Arial"/>
+                <a:latin typeface="Architects Daughter"/>
               </a:rPr>
               <a:t>   reported by name, not as an abstract EER</a:t>
             </a:r>
           </a:p>
           <a:p>
+            <a:pPr>
+              <a:spcBef>
+                <a:spcPts val="200"/>
+              </a:spcBef>
+            </a:pPr>
             <a:r>
               <a:rPr sz="850" b="1">
                 <a:solidFill>
                   <a:srgbClr val="1E1E1E"/>
                 </a:solidFill>
-                <a:latin typeface="Arial"/>
+                <a:latin typeface="Architects Daughter"/>
               </a:rPr>
               <a:t>FAR &lt; 1.5%</a:t>
             </a:r>
@@ -8406,16 +8235,23 @@
                 <a:solidFill>
                   <a:srgbClr val="5C5650"/>
                 </a:solidFill>
-                <a:latin typeface="Arial"/>
-              </a:rPr>
-              <a:t>  synthetic voices that get through        </a:t>
-            </a:r>
+                <a:latin typeface="Architects Daughter"/>
+              </a:rPr>
+              <a:t>  synthetic voices that get through</a:t>
+            </a:r>
+          </a:p>
+          <a:p>
+            <a:pPr>
+              <a:spcBef>
+                <a:spcPts val="200"/>
+              </a:spcBef>
+            </a:pPr>
             <a:r>
               <a:rPr sz="850" b="1">
                 <a:solidFill>
                   <a:srgbClr val="1E1E1E"/>
                 </a:solidFill>
-                <a:latin typeface="Arial"/>
+                <a:latin typeface="Architects Daughter"/>
               </a:rPr>
               <a:t>FRR &lt; 3.0%</a:t>
             </a:r>
@@ -8424,18 +8260,23 @@
                 <a:solidFill>
                   <a:srgbClr val="5C5650"/>
                 </a:solidFill>
-                <a:latin typeface="Arial"/>
+                <a:latin typeface="Architects Daughter"/>
               </a:rPr>
               <a:t>  genuine callers wrongly flagged</a:t>
             </a:r>
           </a:p>
           <a:p>
+            <a:pPr>
+              <a:spcBef>
+                <a:spcPts val="200"/>
+              </a:spcBef>
+            </a:pPr>
             <a:r>
               <a:rPr sz="850" b="1">
                 <a:solidFill>
                   <a:srgbClr val="1E1E1E"/>
                 </a:solidFill>
-                <a:latin typeface="Arial"/>
+                <a:latin typeface="Architects Daughter"/>
               </a:rPr>
               <a:t>RTF &lt;= 0.1</a:t>
             </a:r>
@@ -8444,16 +8285,23 @@
                 <a:solidFill>
                   <a:srgbClr val="5C5650"/>
                 </a:solidFill>
-                <a:latin typeface="Arial"/>
-              </a:rPr>
-              <a:t>  1 s of audio processed in &lt;= 100 ms      </a:t>
-            </a:r>
+                <a:latin typeface="Architects Daughter"/>
+              </a:rPr>
+              <a:t>  1 s of audio processed in &lt;= 100 ms</a:t>
+            </a:r>
+          </a:p>
+          <a:p>
+            <a:pPr>
+              <a:spcBef>
+                <a:spcPts val="200"/>
+              </a:spcBef>
+            </a:pPr>
             <a:r>
               <a:rPr sz="850" b="1">
                 <a:solidFill>
                   <a:srgbClr val="1E1E1E"/>
                 </a:solidFill>
-                <a:latin typeface="Arial"/>
+                <a:latin typeface="Architects Daughter"/>
               </a:rPr>
               <a:t>E2E &lt; 500 ms</a:t>
             </a:r>
@@ -8462,20 +8310,25 @@
                 <a:solidFill>
                   <a:srgbClr val="5C5650"/>
                 </a:solidFill>
-                <a:latin typeface="Arial"/>
+                <a:latin typeface="Architects Daughter"/>
               </a:rPr>
               <a:t>  conversational turn-taking budget</a:t>
             </a:r>
           </a:p>
           <a:p>
+            <a:pPr>
+              <a:spcBef>
+                <a:spcPts val="200"/>
+              </a:spcBef>
+            </a:pPr>
             <a:r>
               <a:rPr sz="800" b="0">
                 <a:solidFill>
                   <a:srgbClr val="5C5650"/>
                 </a:solidFill>
-                <a:latin typeface="Arial"/>
-              </a:rPr>
-              <a:t>Current fusion model measures FAR 0.55% / FRR 0.55% in-domain — both inside target, but not yet validated out-of-domain.</a:t>
+                <a:latin typeface="Architects Daughter"/>
+              </a:rPr>
+              <a:t>Fusion model measures FAR 0.55% / FRR 0.55% in-domain — inside target, not yet validated out-of-domain.</a:t>
             </a:r>
           </a:p>
         </p:txBody>
@@ -8488,8 +8341,8 @@
         </p:nvSpPr>
         <p:spPr>
           <a:xfrm>
-            <a:off x="6309360" y="896112"/>
-            <a:ext cx="5486400" cy="201168"/>
+            <a:off x="6309360" y="1142746"/>
+            <a:ext cx="5486400" cy="303022"/>
           </a:xfrm>
           <a:prstGeom prst="rect">
             <a:avLst/>
@@ -8497,7 +8350,7 @@
           <a:noFill/>
         </p:spPr>
         <p:txBody>
-          <a:bodyPr wrap="square" lIns="0" rIns="0" tIns="0" bIns="0" anchor="t">
+          <a:bodyPr wrap="square" lIns="0" rIns="0" tIns="0" bIns="0">
             <a:spAutoFit/>
           </a:bodyPr>
           <a:lstStyle/>
@@ -8507,7 +8360,7 @@
                 <a:solidFill>
                   <a:srgbClr val="1E1E1E"/>
                 </a:solidFill>
-                <a:latin typeface="Arial"/>
+                <a:latin typeface="Architects Daughter"/>
               </a:rPr>
               <a:t>DEGRADATION LADDER</a:t>
             </a:r>
@@ -8516,7 +8369,7 @@
                 <a:solidFill>
                   <a:srgbClr val="5C5650"/>
                 </a:solidFill>
-                <a:latin typeface="Arial"/>
+                <a:latin typeface="Architects Daughter"/>
               </a:rPr>
               <a:t>   hysteretic: exit only after 10 s of health</a:t>
             </a:r>
@@ -8531,18 +8384,18 @@
         </p:nvSpPr>
         <p:spPr>
           <a:xfrm>
-            <a:off x="6309360" y="1133856"/>
-            <a:ext cx="5486400" cy="365760"/>
+            <a:off x="6309360" y="1398778"/>
+            <a:ext cx="5486400" cy="295148"/>
           </a:xfrm>
           <a:prstGeom prst="roundRect">
             <a:avLst>
-              <a:gd name="adj" fmla="val 10000"/>
+              <a:gd name="adj" fmla="val 14000"/>
             </a:avLst>
           </a:prstGeom>
           <a:solidFill>
             <a:srgbClr val="B2F2BB"/>
           </a:solidFill>
-          <a:ln w="25400">
+          <a:ln w="28575">
             <a:solidFill>
               <a:srgbClr val="2F9E44"/>
             </a:solidFill>
@@ -8573,7 +8426,7 @@
           </a:fontRef>
         </p:style>
         <p:txBody>
-          <a:bodyPr rtlCol="0" anchor="ctr" wrap="square" tIns="54864" bIns="54864"/>
+          <a:bodyPr rtlCol="0" anchor="ctr" wrap="square" lIns="100584" rIns="100584" tIns="64008" bIns="64008"/>
           <a:lstStyle/>
           <a:p>
             <a:pPr algn="ctr"/>
@@ -8582,16 +8435,16 @@
                 <a:solidFill>
                   <a:srgbClr val="2F9E44"/>
                 </a:solidFill>
-                <a:latin typeface="Arial"/>
+                <a:latin typeface="Architects Daughter"/>
               </a:rPr>
               <a:t>L0  NORMAL    </a:t>
             </a:r>
             <a:r>
-              <a:rPr sz="800" b="0">
+              <a:rPr sz="850" b="0">
                 <a:solidFill>
                   <a:srgbClr val="1E1E1E"/>
                 </a:solidFill>
-                <a:latin typeface="Arial"/>
+                <a:latin typeface="Architects Daughter"/>
               </a:rPr>
               <a:t>2 s window / 100 ms hop · full cadence</a:t>
             </a:r>
@@ -8606,18 +8459,18 @@
         </p:nvSpPr>
         <p:spPr>
           <a:xfrm>
-            <a:off x="6309360" y="1536192"/>
-            <a:ext cx="5486400" cy="365760"/>
+            <a:off x="6309360" y="1803654"/>
+            <a:ext cx="5486400" cy="295148"/>
           </a:xfrm>
           <a:prstGeom prst="roundRect">
             <a:avLst>
-              <a:gd name="adj" fmla="val 10000"/>
+              <a:gd name="adj" fmla="val 14000"/>
             </a:avLst>
           </a:prstGeom>
           <a:solidFill>
             <a:srgbClr val="EEFBF1"/>
           </a:solidFill>
-          <a:ln w="25400">
+          <a:ln w="28575">
             <a:solidFill>
               <a:srgbClr val="2F9E44"/>
             </a:solidFill>
@@ -8648,7 +8501,7 @@
           </a:fontRef>
         </p:style>
         <p:txBody>
-          <a:bodyPr rtlCol="0" anchor="ctr" wrap="square" tIns="54864" bIns="54864"/>
+          <a:bodyPr rtlCol="0" anchor="ctr" wrap="square" lIns="100584" rIns="100584" tIns="64008" bIns="64008"/>
           <a:lstStyle/>
           <a:p>
             <a:pPr algn="ctr"/>
@@ -8657,16 +8510,16 @@
                 <a:solidFill>
                   <a:srgbClr val="2F9E44"/>
                 </a:solidFill>
-                <a:latin typeface="Arial"/>
+                <a:latin typeface="Architects Daughter"/>
               </a:rPr>
               <a:t>L1  ELEVATED    </a:t>
             </a:r>
             <a:r>
-              <a:rPr sz="800" b="0">
+              <a:rPr sz="850" b="0">
                 <a:solidFill>
                   <a:srgbClr val="1E1E1E"/>
                 </a:solidFill>
-                <a:latin typeface="Arial"/>
+                <a:latin typeface="Architects Daughter"/>
               </a:rPr>
               <a:t>queue &gt; 2 windows -&gt; hop widens to 200 ms</a:t>
             </a:r>
@@ -8681,18 +8534,18 @@
         </p:nvSpPr>
         <p:spPr>
           <a:xfrm>
-            <a:off x="6309360" y="1938528"/>
-            <a:ext cx="5486400" cy="365760"/>
+            <a:off x="6309360" y="2208530"/>
+            <a:ext cx="5486400" cy="295148"/>
           </a:xfrm>
           <a:prstGeom prst="roundRect">
             <a:avLst>
-              <a:gd name="adj" fmla="val 10000"/>
+              <a:gd name="adj" fmla="val 14000"/>
             </a:avLst>
           </a:prstGeom>
           <a:solidFill>
             <a:srgbClr val="FFEC99"/>
           </a:solidFill>
-          <a:ln w="25400">
+          <a:ln w="28575">
             <a:solidFill>
               <a:srgbClr val="F08C00"/>
             </a:solidFill>
@@ -8723,7 +8576,7 @@
           </a:fontRef>
         </p:style>
         <p:txBody>
-          <a:bodyPr rtlCol="0" anchor="ctr" wrap="square" tIns="54864" bIns="54864"/>
+          <a:bodyPr rtlCol="0" anchor="ctr" wrap="square" lIns="100584" rIns="100584" tIns="64008" bIns="64008"/>
           <a:lstStyle/>
           <a:p>
             <a:pPr algn="ctr"/>
@@ -8732,16 +8585,16 @@
                 <a:solidFill>
                   <a:srgbClr val="F08C00"/>
                 </a:solidFill>
-                <a:latin typeface="Arial"/>
+                <a:latin typeface="Architects Daughter"/>
               </a:rPr>
               <a:t>L2  DEGRADED    </a:t>
             </a:r>
             <a:r>
-              <a:rPr sz="800" b="0">
+              <a:rPr sz="850" b="0">
                 <a:solidFill>
                   <a:srgbClr val="1E1E1E"/>
                 </a:solidFill>
-                <a:latin typeface="Arial"/>
+                <a:latin typeface="Architects Daughter"/>
               </a:rPr>
               <a:t>ring dropping -&gt; hop 500 ms, drop oldest</a:t>
             </a:r>
@@ -8756,18 +8609,18 @@
         </p:nvSpPr>
         <p:spPr>
           <a:xfrm>
-            <a:off x="6309360" y="2340864"/>
-            <a:ext cx="5486400" cy="365760"/>
+            <a:off x="6309360" y="2613406"/>
+            <a:ext cx="5486400" cy="295148"/>
           </a:xfrm>
           <a:prstGeom prst="roundRect">
             <a:avLst>
-              <a:gd name="adj" fmla="val 10000"/>
+              <a:gd name="adj" fmla="val 14000"/>
             </a:avLst>
           </a:prstGeom>
           <a:solidFill>
             <a:srgbClr val="FFC9C9"/>
           </a:solidFill>
-          <a:ln w="25400">
+          <a:ln w="28575">
             <a:solidFill>
               <a:srgbClr val="E03131"/>
             </a:solidFill>
@@ -8798,7 +8651,7 @@
           </a:fontRef>
         </p:style>
         <p:txBody>
-          <a:bodyPr rtlCol="0" anchor="ctr" wrap="square" tIns="54864" bIns="54864"/>
+          <a:bodyPr rtlCol="0" anchor="ctr" wrap="square" lIns="100584" rIns="100584" tIns="64008" bIns="64008"/>
           <a:lstStyle/>
           <a:p>
             <a:pPr algn="ctr"/>
@@ -8807,16 +8660,16 @@
                 <a:solidFill>
                   <a:srgbClr val="E03131"/>
                 </a:solidFill>
-                <a:latin typeface="Arial"/>
+                <a:latin typeface="Architects Daughter"/>
               </a:rPr>
               <a:t>L3  DETECTOR DOWN    </a:t>
             </a:r>
             <a:r>
-              <a:rPr sz="800" b="0">
+              <a:rPr sz="850" b="0">
                 <a:solidFill>
                   <a:srgbClr val="1E1E1E"/>
                 </a:solidFill>
-                <a:latin typeface="Arial"/>
+                <a:latin typeface="Architects Daughter"/>
               </a:rPr>
               <a:t>gRPC gone &gt; 5 s -&gt; scoring stops, call lives</a:t>
             </a:r>
@@ -8831,18 +8684,18 @@
         </p:nvSpPr>
         <p:spPr>
           <a:xfrm>
-            <a:off x="6309360" y="2743200"/>
-            <a:ext cx="5486400" cy="365760"/>
+            <a:off x="6309360" y="3018282"/>
+            <a:ext cx="5486400" cy="295148"/>
           </a:xfrm>
           <a:prstGeom prst="roundRect">
             <a:avLst>
-              <a:gd name="adj" fmla="val 10000"/>
+              <a:gd name="adj" fmla="val 14000"/>
             </a:avLst>
           </a:prstGeom>
           <a:solidFill>
             <a:srgbClr val="FFF0EF"/>
           </a:solidFill>
-          <a:ln w="25400">
+          <a:ln w="28575">
             <a:solidFill>
               <a:srgbClr val="E03131"/>
             </a:solidFill>
@@ -8873,7 +8726,7 @@
           </a:fontRef>
         </p:style>
         <p:txBody>
-          <a:bodyPr rtlCol="0" anchor="ctr" wrap="square" tIns="54864" bIns="54864"/>
+          <a:bodyPr rtlCol="0" anchor="ctr" wrap="square" lIns="100584" rIns="100584" tIns="64008" bIns="64008"/>
           <a:lstStyle/>
           <a:p>
             <a:pPr algn="ctr"/>
@@ -8882,16 +8735,16 @@
                 <a:solidFill>
                   <a:srgbClr val="E03131"/>
                 </a:solidFill>
-                <a:latin typeface="Arial"/>
+                <a:latin typeface="Architects Daughter"/>
               </a:rPr>
               <a:t>L4  SHEDDING    </a:t>
             </a:r>
             <a:r>
-              <a:rPr sz="800" b="0">
+              <a:rPr sz="850" b="0">
                 <a:solidFill>
                   <a:srgbClr val="1E1E1E"/>
                 </a:solidFill>
-                <a:latin typeface="Arial"/>
+                <a:latin typeface="Architects Daughter"/>
               </a:rPr>
               <a:t>node at capacity -&gt; reject NEW sessions only</a:t>
             </a:r>
@@ -8906,8 +8759,8 @@
         </p:nvSpPr>
         <p:spPr>
           <a:xfrm>
-            <a:off x="6309360" y="3182112"/>
-            <a:ext cx="5486400" cy="512064"/>
+            <a:off x="6309360" y="3496310"/>
+            <a:ext cx="5486400" cy="572516"/>
           </a:xfrm>
           <a:prstGeom prst="roundRect">
             <a:avLst>
@@ -8917,7 +8770,7 @@
           <a:solidFill>
             <a:srgbClr val="FFF0EF"/>
           </a:solidFill>
-          <a:ln w="25400">
+          <a:ln w="28575">
             <a:solidFill>
               <a:srgbClr val="E03131"/>
             </a:solidFill>
@@ -8948,38 +8801,43 @@
           </a:fontRef>
         </p:style>
         <p:txBody>
-          <a:bodyPr rtlCol="0" anchor="ctr" wrap="square" tIns="54864" bIns="54864"/>
+          <a:bodyPr rtlCol="0" anchor="ctr" wrap="square" lIns="100584" rIns="100584" tIns="64008" bIns="64008"/>
           <a:lstStyle/>
           <a:p>
             <a:pPr algn="ctr"/>
             <a:r>
-              <a:rPr sz="850" b="1">
+              <a:rPr sz="900" b="1">
                 <a:solidFill>
                   <a:srgbClr val="E03131"/>
                 </a:solidFill>
-                <a:latin typeface="Arial"/>
+                <a:latin typeface="Architects Daughter"/>
               </a:rPr>
               <a:t>GOVERNING RULE</a:t>
             </a:r>
             <a:r>
-              <a:rPr sz="850" b="0">
+              <a:rPr sz="900" b="0">
                 <a:solidFill>
                   <a:srgbClr val="1E1E1E"/>
                 </a:solidFill>
-                <a:latin typeface="Arial"/>
+                <a:latin typeface="Architects Daughter"/>
               </a:rPr>
               <a:t>   absence of a score is never equivalent to a low score.</a:t>
             </a:r>
           </a:p>
           <a:p>
+            <a:pPr>
+              <a:spcBef>
+                <a:spcPts val="200"/>
+              </a:spcBef>
+            </a:pPr>
             <a:r>
               <a:rPr sz="800" b="0">
                 <a:solidFill>
                   <a:srgbClr val="5C5650"/>
                 </a:solidFill>
-                <a:latin typeface="Arial"/>
-              </a:rPr>
-              <a:t>Reporting “genuine” when the pipeline is broken is the one failure mode that actively causes harm.</a:t>
+                <a:latin typeface="Architects Daughter"/>
+              </a:rPr>
+              <a:t>Reporting “genuine” when the pipeline is broken is the one failure mode that actively causes harm — it green-lights the fraud we exist to stop.</a:t>
             </a:r>
           </a:p>
         </p:txBody>
@@ -8992,8 +8850,8 @@
         </p:nvSpPr>
         <p:spPr>
           <a:xfrm>
-            <a:off x="384048" y="3840480"/>
-            <a:ext cx="11430000" cy="219456"/>
+            <a:off x="384048" y="4612386"/>
+            <a:ext cx="11430000" cy="310896"/>
           </a:xfrm>
           <a:prstGeom prst="rect">
             <a:avLst/>
@@ -9001,7 +8859,7 @@
           <a:noFill/>
         </p:spPr>
         <p:txBody>
-          <a:bodyPr wrap="square" lIns="0" rIns="0" tIns="0" bIns="0" anchor="t">
+          <a:bodyPr wrap="square" lIns="0" rIns="0" tIns="0" bIns="0">
             <a:spAutoFit/>
           </a:bodyPr>
           <a:lstStyle/>
@@ -9011,7 +8869,7 @@
                 <a:solidFill>
                   <a:srgbClr val="E03131"/>
                 </a:solidFill>
-                <a:latin typeface="Arial"/>
+                <a:latin typeface="Architects Daughter"/>
               </a:rPr>
               <a:t>THE THREE THAT FAIL SILENTLY</a:t>
             </a:r>
@@ -9020,7 +8878,7 @@
                 <a:solidFill>
                   <a:srgbClr val="5C5650"/>
                 </a:solidFill>
-                <a:latin typeface="Arial"/>
+                <a:latin typeface="Architects Daughter"/>
               </a:rPr>
               <a:t>   — no exception, no error, just quietly wrong output. 71 edge cases catalogued in total.</a:t>
             </a:r>
@@ -9035,8 +8893,8 @@
         </p:nvSpPr>
         <p:spPr>
           <a:xfrm>
-            <a:off x="384048" y="4096512"/>
-            <a:ext cx="3712463" cy="1847088"/>
+            <a:off x="384048" y="4868418"/>
+            <a:ext cx="3712463" cy="1451864"/>
           </a:xfrm>
           <a:prstGeom prst="roundRect">
             <a:avLst>
@@ -9077,7 +8935,7 @@
           </a:fontRef>
         </p:style>
         <p:txBody>
-          <a:bodyPr rtlCol="0" anchor="t" wrap="square" tIns="54864" bIns="54864"/>
+          <a:bodyPr rtlCol="0" anchor="t" wrap="square" lIns="100584" rIns="100584" tIns="64008" bIns="64008"/>
           <a:lstStyle/>
           <a:p>
             <a:pPr algn="ctr"/>
@@ -9086,73 +8944,82 @@
                 <a:solidFill>
                   <a:srgbClr val="E03131"/>
                 </a:solidFill>
-                <a:latin typeface="Arial"/>
+                <a:latin typeface="Architects Daughter"/>
               </a:rPr>
               <a:t>AU-04</a:t>
             </a:r>
             <a:r>
-              <a:rPr sz="750" b="0">
+              <a:rPr sz="800" b="0">
                 <a:solidFill>
                   <a:srgbClr val="5C5650"/>
                 </a:solidFill>
-                <a:latin typeface="Arial"/>
+                <a:latin typeface="Architects Daughter"/>
               </a:rPr>
               <a:t>   AUDIO</a:t>
             </a:r>
           </a:p>
           <a:p>
+            <a:pPr>
+              <a:spcBef>
+                <a:spcPts val="200"/>
+              </a:spcBef>
+            </a:pPr>
             <a:r>
               <a:rPr sz="1100" b="1">
                 <a:solidFill>
                   <a:srgbClr val="1E1E1E"/>
                 </a:solidFill>
-                <a:latin typeface="Arial"/>
+                <a:latin typeface="Architects Daughter"/>
               </a:rPr>
               <a:t>Averaging a dual-leg fork</a:t>
             </a:r>
           </a:p>
           <a:p>
+            <a:pPr>
+              <a:spcBef>
+                <a:spcPts val="200"/>
+              </a:spcBef>
+            </a:pPr>
             <a:r>
               <a:rPr sz="800" b="0">
                 <a:solidFill>
                   <a:srgbClr val="1E1E1E"/>
                 </a:solidFill>
-                <a:latin typeface="Arial"/>
+                <a:latin typeface="Architects Daughter"/>
               </a:rPr>
               <a:t>The gateway forks caller and callee as two channels. Averaging them mixes two speakers into one signal, destroying both the deepfake and the speaker-verification signal.</a:t>
             </a:r>
           </a:p>
           <a:p>
+            <a:pPr>
+              <a:spcBef>
+                <a:spcPts val="200"/>
+              </a:spcBef>
+            </a:pPr>
             <a:r>
               <a:rPr sz="800" b="1">
                 <a:solidFill>
                   <a:srgbClr val="E03131"/>
                 </a:solidFill>
-                <a:latin typeface="Arial"/>
-              </a:rPr>
-              <a:t>FIX  mono mandatory. Two legs arrive as two sessions sharing a call_id. Reject 2-channel input outright — never average.</a:t>
-            </a:r>
-          </a:p>
-          <a:p>
-            <a:r>
-              <a:rPr sz="750" b="0">
-                <a:solidFill>
-                  <a:srgbClr val="5C5650"/>
-                </a:solidFill>
-                <a:latin typeface="Arial"/>
-              </a:rPr>
-              <a:t>TEST  assert channels == 1 at the ingress adapter; a 2-channel fixture must raise.</a:t>
-            </a:r>
-          </a:p>
-          <a:p>
-            <a:r>
-              <a:rPr sz="750" b="1">
+                <a:latin typeface="Architects Daughter"/>
+              </a:rPr>
+              <a:t>FIX  mono mandatory. Two legs arrive as two sessions sharing a call_id. Never average.</a:t>
+            </a:r>
+          </a:p>
+          <a:p>
+            <a:pPr>
+              <a:spcBef>
+                <a:spcPts val="200"/>
+              </a:spcBef>
+            </a:pPr>
+            <a:r>
+              <a:rPr sz="800" b="1">
                 <a:solidFill>
                   <a:srgbClr val="1E1E1E"/>
                 </a:solidFill>
-                <a:latin typeface="Arial"/>
-              </a:rPr>
-              <a:t>COST IF MISSED  every score on every dual-leg call is meaningless, and nothing anywhere reports an error.</a:t>
+                <a:latin typeface="Architects Daughter"/>
+              </a:rPr>
+              <a:t>COST IF MISSED  every score on every dual-leg call is meaningless, and nothing reports an error.</a:t>
             </a:r>
           </a:p>
         </p:txBody>
@@ -9165,8 +9032,8 @@
         </p:nvSpPr>
         <p:spPr>
           <a:xfrm>
-            <a:off x="4242816" y="4096512"/>
-            <a:ext cx="3712463" cy="1847088"/>
+            <a:off x="4242816" y="4868418"/>
+            <a:ext cx="3712463" cy="1451864"/>
           </a:xfrm>
           <a:prstGeom prst="roundRect">
             <a:avLst>
@@ -9207,7 +9074,7 @@
           </a:fontRef>
         </p:style>
         <p:txBody>
-          <a:bodyPr rtlCol="0" anchor="t" wrap="square" tIns="54864" bIns="54864"/>
+          <a:bodyPr rtlCol="0" anchor="t" wrap="square" lIns="100584" rIns="100584" tIns="64008" bIns="64008"/>
           <a:lstStyle/>
           <a:p>
             <a:pPr algn="ctr"/>
@@ -9216,71 +9083,80 @@
                 <a:solidFill>
                   <a:srgbClr val="E03131"/>
                 </a:solidFill>
-                <a:latin typeface="Arial"/>
+                <a:latin typeface="Architects Daughter"/>
               </a:rPr>
               <a:t>AU-08</a:t>
             </a:r>
             <a:r>
-              <a:rPr sz="750" b="0">
+              <a:rPr sz="800" b="0">
                 <a:solidFill>
                   <a:srgbClr val="5C5650"/>
                 </a:solidFill>
-                <a:latin typeface="Arial"/>
+                <a:latin typeface="Architects Daughter"/>
               </a:rPr>
               <a:t>   AUDIO</a:t>
             </a:r>
           </a:p>
           <a:p>
+            <a:pPr>
+              <a:spcBef>
+                <a:spcPts val="200"/>
+              </a:spcBef>
+            </a:pPr>
             <a:r>
               <a:rPr sz="1100" b="1">
                 <a:solidFill>
                   <a:srgbClr val="1E1E1E"/>
                 </a:solidFill>
-                <a:latin typeface="Arial"/>
+                <a:latin typeface="Architects Daughter"/>
               </a:rPr>
               <a:t>Packet-loss concealment</a:t>
             </a:r>
           </a:p>
           <a:p>
+            <a:pPr>
+              <a:spcBef>
+                <a:spcPts val="200"/>
+              </a:spcBef>
+            </a:pPr>
             <a:r>
               <a:rPr sz="800" b="0">
                 <a:solidFill>
                   <a:srgbClr val="1E1E1E"/>
                 </a:solidFill>
-                <a:latin typeface="Arial"/>
+                <a:latin typeface="Architects Daughter"/>
               </a:rPr>
               <a:t>On a bad line the gateway invents audio to cover lost packets. That audio is literally synthetic — so the detector flags a genuine caller as a deepfake.</a:t>
             </a:r>
           </a:p>
           <a:p>
+            <a:pPr>
+              <a:spcBef>
+                <a:spcPts val="200"/>
+              </a:spcBef>
+            </a:pPr>
             <a:r>
               <a:rPr sz="800" b="1">
                 <a:solidFill>
                   <a:srgbClr val="E03131"/>
                 </a:solidFill>
-                <a:latin typeface="Arial"/>
-              </a:rPr>
-              <a:t>FIX  gateway sets concealed=true; windows over ~15% concealed samples are skipped or sent with a down-weight flag.</a:t>
-            </a:r>
-          </a:p>
-          <a:p>
-            <a:r>
-              <a:rPr sz="750" b="0">
-                <a:solidFill>
-                  <a:srgbClr val="5C5650"/>
-                </a:solidFill>
-                <a:latin typeface="Arial"/>
-              </a:rPr>
-              <a:t>TEST  replay at 30% packet loss with PLC on — false-positive rate must not rise.</a:t>
-            </a:r>
-          </a:p>
-          <a:p>
-            <a:r>
-              <a:rPr sz="750" b="1">
+                <a:latin typeface="Architects Daughter"/>
+              </a:rPr>
+              <a:t>FIX  gateway sets concealed=true; windows over ~15% concealed samples are skipped or down-weighted.</a:t>
+            </a:r>
+          </a:p>
+          <a:p>
+            <a:pPr>
+              <a:spcBef>
+                <a:spcPts val="200"/>
+              </a:spcBef>
+            </a:pPr>
+            <a:r>
+              <a:rPr sz="800" b="1">
                 <a:solidFill>
                   <a:srgbClr val="1E1E1E"/>
                 </a:solidFill>
-                <a:latin typeface="Arial"/>
+                <a:latin typeface="Architects Daughter"/>
               </a:rPr>
               <a:t>COST IF MISSED  genuine customers on poor lines get accused of fraud. This is what gets the system switched off.</a:t>
             </a:r>
@@ -9295,8 +9171,8 @@
         </p:nvSpPr>
         <p:spPr>
           <a:xfrm>
-            <a:off x="8101583" y="4096512"/>
-            <a:ext cx="3712463" cy="1847088"/>
+            <a:off x="8101583" y="4868418"/>
+            <a:ext cx="3712463" cy="1451864"/>
           </a:xfrm>
           <a:prstGeom prst="roundRect">
             <a:avLst>
@@ -9337,7 +9213,7 @@
           </a:fontRef>
         </p:style>
         <p:txBody>
-          <a:bodyPr rtlCol="0" anchor="t" wrap="square" tIns="54864" bIns="54864"/>
+          <a:bodyPr rtlCol="0" anchor="t" wrap="square" lIns="100584" rIns="100584" tIns="64008" bIns="64008"/>
           <a:lstStyle/>
           <a:p>
             <a:pPr algn="ctr"/>
@@ -9346,73 +9222,82 @@
                 <a:solidFill>
                   <a:srgbClr val="E03131"/>
                 </a:solidFill>
-                <a:latin typeface="Arial"/>
+                <a:latin typeface="Architects Daughter"/>
               </a:rPr>
               <a:t>SS-06</a:t>
             </a:r>
             <a:r>
-              <a:rPr sz="750" b="0">
+              <a:rPr sz="800" b="0">
                 <a:solidFill>
                   <a:srgbClr val="5C5650"/>
                 </a:solidFill>
-                <a:latin typeface="Arial"/>
+                <a:latin typeface="Architects Daughter"/>
               </a:rPr>
               <a:t>   SESSION</a:t>
             </a:r>
           </a:p>
           <a:p>
+            <a:pPr>
+              <a:spcBef>
+                <a:spcPts val="200"/>
+              </a:spcBef>
+            </a:pPr>
             <a:r>
               <a:rPr sz="1100" b="1">
                 <a:solidFill>
                   <a:srgbClr val="1E1E1E"/>
                 </a:solidFill>
-                <a:latin typeface="Arial"/>
+                <a:latin typeface="Architects Daughter"/>
               </a:rPr>
               <a:t>Missing speaker enrolment</a:t>
             </a:r>
           </a:p>
           <a:p>
+            <a:pPr>
+              <a:spcBef>
+                <a:spcPts val="200"/>
+              </a:spcBef>
+            </a:pPr>
             <a:r>
               <a:rPr sz="800" b="0">
                 <a:solidFill>
                   <a:srgbClr val="1E1E1E"/>
                 </a:solidFill>
-                <a:latin typeface="Arial"/>
+                <a:latin typeface="Architects Daughter"/>
               </a:rPr>
               <a:t>No reference voiceprint makes similarity return 0.0, which fusion reads as 'total mismatch' — fabricating fraud signal for every caller who never enrolled.</a:t>
             </a:r>
           </a:p>
           <a:p>
+            <a:pPr>
+              <a:spcBef>
+                <a:spcPts val="200"/>
+              </a:spcBef>
+            </a:pPr>
             <a:r>
               <a:rPr sz="800" b="1">
                 <a:solidFill>
                   <a:srgbClr val="E03131"/>
                 </a:solidFill>
-                <a:latin typeface="Arial"/>
+                <a:latin typeface="Architects Daughter"/>
               </a:rPr>
               <a:t>FIX  emit null plus speaker_signal=UNAVAILABLE. The risk engine renormalises over remaining signals.</a:t>
             </a:r>
           </a:p>
           <a:p>
-            <a:r>
-              <a:rPr sz="750" b="0">
-                <a:solidFill>
-                  <a:srgbClr val="5C5650"/>
-                </a:solidFill>
-                <a:latin typeface="Arial"/>
-              </a:rPr>
-              <a:t>TEST  an unenrolled caller must not score higher than an enrolled match baseline.</a:t>
-            </a:r>
-          </a:p>
-          <a:p>
-            <a:r>
-              <a:rPr sz="750" b="1">
+            <a:pPr>
+              <a:spcBef>
+                <a:spcPts val="200"/>
+              </a:spcBef>
+            </a:pPr>
+            <a:r>
+              <a:rPr sz="800" b="1">
                 <a:solidFill>
                   <a:srgbClr val="1E1E1E"/>
                 </a:solidFill>
-                <a:latin typeface="Arial"/>
-              </a:rPr>
-              <a:t>COST IF MISSED  every first-time caller looks like an impostor — false accusations at the worst possible moment.</a:t>
+                <a:latin typeface="Architects Daughter"/>
+              </a:rPr>
+              <a:t>COST IF MISSED  every first-time caller looks like an impostor — false accusations at the worst moment.</a:t>
             </a:r>
           </a:p>
         </p:txBody>
